--- a/V2授课PPT/W11-第5次课-传统分类：逻辑回归+决策.pptx
+++ b/V2授课PPT/W11-第5次课-传统分类：逻辑回归+决策.pptx
@@ -44,6 +44,8 @@
     <p:sldId id="316" r:id="rId68"/>
     <p:sldId id="364" r:id="rId63"/>
     <p:sldId id="365" r:id="rId72"/>
+    <p:sldId id="366" r:id="rId61"/>
+    <p:sldId id="367" r:id="rId74"/>
     <p:sldId id="363" r:id="rId70"/>
     <p:sldId id="317" r:id="rId69"/>
     <p:sldId id="319" r:id="rId71"/>
@@ -8196,7 +8198,7 @@
                 </a:solidFill>
                 <a:latin typeface="微软雅黑"/>
               </a:rPr>
-              <a:t>10 / 65</a:t>
+              <a:t>10 / 67</a:t>
             </a:r>
           </a:p>
         </p:txBody>
@@ -9051,7 +9053,7 @@
                 </a:solidFill>
                 <a:latin typeface="微软雅黑"/>
               </a:rPr>
-              <a:t>11 / 65</a:t>
+              <a:t>11 / 67</a:t>
             </a:r>
           </a:p>
         </p:txBody>
@@ -9843,7 +9845,7 @@
                 </a:solidFill>
                 <a:latin typeface="微软雅黑"/>
               </a:rPr>
-              <a:t>12 / 65</a:t>
+              <a:t>12 / 67</a:t>
             </a:r>
           </a:p>
         </p:txBody>
@@ -10329,7 +10331,7 @@
                 </a:solidFill>
                 <a:latin typeface="微软雅黑"/>
               </a:rPr>
-              <a:t>13 / 65</a:t>
+              <a:t>13 / 67</a:t>
             </a:r>
           </a:p>
         </p:txBody>
@@ -11358,7 +11360,7 @@
                 </a:solidFill>
                 <a:latin typeface="微软雅黑"/>
               </a:rPr>
-              <a:t>14 / 65</a:t>
+              <a:t>14 / 67</a:t>
             </a:r>
           </a:p>
         </p:txBody>
@@ -12064,7 +12066,7 @@
                 </a:solidFill>
                 <a:latin typeface="微软雅黑"/>
               </a:rPr>
-              <a:t>15 / 65</a:t>
+              <a:t>15 / 67</a:t>
             </a:r>
           </a:p>
         </p:txBody>
@@ -12770,7 +12772,7 @@
                 </a:solidFill>
                 <a:latin typeface="微软雅黑"/>
               </a:rPr>
-              <a:t>16 / 65</a:t>
+              <a:t>16 / 67</a:t>
             </a:r>
           </a:p>
         </p:txBody>
@@ -13476,7 +13478,7 @@
                 </a:solidFill>
                 <a:latin typeface="微软雅黑"/>
               </a:rPr>
-              <a:t>17 / 65</a:t>
+              <a:t>17 / 67</a:t>
             </a:r>
           </a:p>
         </p:txBody>
@@ -14182,7 +14184,7 @@
                 </a:solidFill>
                 <a:latin typeface="微软雅黑"/>
               </a:rPr>
-              <a:t>18 / 65</a:t>
+              <a:t>18 / 67</a:t>
             </a:r>
           </a:p>
         </p:txBody>
@@ -14656,7 +14658,7 @@
                 </a:solidFill>
                 <a:latin typeface="微软雅黑"/>
               </a:rPr>
-              <a:t>19 / 65</a:t>
+              <a:t>19 / 67</a:t>
             </a:r>
           </a:p>
         </p:txBody>
@@ -16384,7 +16386,7 @@
                 </a:solidFill>
                 <a:latin typeface="微软雅黑"/>
               </a:rPr>
-              <a:t>2 / 65</a:t>
+              <a:t>2 / 67</a:t>
             </a:r>
           </a:p>
         </p:txBody>
@@ -17090,7 +17092,7 @@
                 </a:solidFill>
                 <a:latin typeface="微软雅黑"/>
               </a:rPr>
-              <a:t>20 / 65</a:t>
+              <a:t>20 / 67</a:t>
             </a:r>
           </a:p>
         </p:txBody>
@@ -17945,7 +17947,7 @@
                 </a:solidFill>
                 <a:latin typeface="微软雅黑"/>
               </a:rPr>
-              <a:t>21 / 65</a:t>
+              <a:t>21 / 67</a:t>
             </a:r>
           </a:p>
         </p:txBody>
@@ -18915,7 +18917,7 @@
                 </a:solidFill>
                 <a:latin typeface="微软雅黑"/>
               </a:rPr>
-              <a:t>22 / 65</a:t>
+              <a:t>22 / 67</a:t>
             </a:r>
           </a:p>
         </p:txBody>
@@ -19451,7 +19453,7 @@
                 </a:solidFill>
                 <a:latin typeface="微软雅黑"/>
               </a:rPr>
-              <a:t>23 / 65</a:t>
+              <a:t>23 / 67</a:t>
             </a:r>
           </a:p>
         </p:txBody>
@@ -20421,7 +20423,7 @@
                 </a:solidFill>
                 <a:latin typeface="微软雅黑"/>
               </a:rPr>
-              <a:t>24 / 65</a:t>
+              <a:t>24 / 67</a:t>
             </a:r>
           </a:p>
         </p:txBody>
@@ -21391,7 +21393,7 @@
                 </a:solidFill>
                 <a:latin typeface="微软雅黑"/>
               </a:rPr>
-              <a:t>25 / 65</a:t>
+              <a:t>25 / 67</a:t>
             </a:r>
           </a:p>
         </p:txBody>
@@ -22361,7 +22363,7 @@
                 </a:solidFill>
                 <a:latin typeface="微软雅黑"/>
               </a:rPr>
-              <a:t>26 / 65</a:t>
+              <a:t>26 / 67</a:t>
             </a:r>
           </a:p>
         </p:txBody>
@@ -23331,7 +23333,7 @@
                 </a:solidFill>
                 <a:latin typeface="微软雅黑"/>
               </a:rPr>
-              <a:t>27 / 65</a:t>
+              <a:t>27 / 67</a:t>
             </a:r>
           </a:p>
         </p:txBody>
@@ -24301,7 +24303,7 @@
                 </a:solidFill>
                 <a:latin typeface="微软雅黑"/>
               </a:rPr>
-              <a:t>28 / 65</a:t>
+              <a:t>28 / 67</a:t>
             </a:r>
           </a:p>
         </p:txBody>
@@ -25273,7 +25275,7 @@
                 </a:solidFill>
                 <a:latin typeface="微软雅黑"/>
               </a:rPr>
-              <a:t>29 / 65</a:t>
+              <a:t>29 / 67</a:t>
             </a:r>
           </a:p>
         </p:txBody>
@@ -26065,7 +26067,7 @@
                 </a:solidFill>
                 <a:latin typeface="微软雅黑"/>
               </a:rPr>
-              <a:t>3 / 65</a:t>
+              <a:t>3 / 67</a:t>
             </a:r>
           </a:p>
         </p:txBody>
@@ -26528,7 +26530,7 @@
                 </a:solidFill>
                 <a:latin typeface="微软雅黑"/>
               </a:rPr>
-              <a:t>30 / 65</a:t>
+              <a:t>30 / 67</a:t>
             </a:r>
           </a:p>
         </p:txBody>
@@ -26972,7 +26974,7 @@
                 </a:solidFill>
                 <a:latin typeface="微软雅黑"/>
               </a:rPr>
-              <a:t>31 / 65</a:t>
+              <a:t>31 / 67</a:t>
             </a:r>
           </a:p>
         </p:txBody>
@@ -28016,7 +28018,7 @@
                 </a:solidFill>
                 <a:latin typeface="微软雅黑"/>
               </a:rPr>
-              <a:t>32 / 65</a:t>
+              <a:t>32 / 67</a:t>
             </a:r>
           </a:p>
         </p:txBody>
@@ -28722,7 +28724,7 @@
                 </a:solidFill>
                 <a:latin typeface="微软雅黑"/>
               </a:rPr>
-              <a:t>33 / 65</a:t>
+              <a:t>33 / 67</a:t>
             </a:r>
           </a:p>
         </p:txBody>
@@ -29577,7 +29579,7 @@
                 </a:solidFill>
                 <a:latin typeface="微软雅黑"/>
               </a:rPr>
-              <a:t>34 / 65</a:t>
+              <a:t>34 / 67</a:t>
             </a:r>
           </a:p>
         </p:txBody>
@@ -31645,7 +31647,7 @@
                 </a:solidFill>
                 <a:latin typeface="微软雅黑"/>
               </a:rPr>
-              <a:t>35 / 65</a:t>
+              <a:t>35 / 67</a:t>
             </a:r>
           </a:p>
         </p:txBody>
@@ -32437,7 +32439,7 @@
                 </a:solidFill>
                 <a:latin typeface="微软雅黑"/>
               </a:rPr>
-              <a:t>36 / 65</a:t>
+              <a:t>36 / 67</a:t>
             </a:r>
           </a:p>
         </p:txBody>
@@ -33108,7 +33110,7 @@
                 </a:solidFill>
                 <a:latin typeface="微软雅黑"/>
               </a:rPr>
-              <a:t>37 / 65</a:t>
+              <a:t>37 / 67</a:t>
             </a:r>
           </a:p>
         </p:txBody>
@@ -33384,7 +33386,7 @@
                 </a:solidFill>
                 <a:latin typeface="微软雅黑"/>
               </a:rPr>
-              <a:t>38 / 65</a:t>
+              <a:t>38 / 67</a:t>
             </a:r>
           </a:p>
         </p:txBody>
@@ -33556,142 +33558,87 @@
                   <a:srgbClr val="0545E8"/>
                 </a:solidFill>
               </a:rPr>
-              <a:t>① 参考实现真实运行输出（本工单完成态）</a:t>
-            </a:r>
-          </a:p>
-          <a:p>
-            <a:pPr algn="l">
-              <a:spcBef>
-                <a:spcPts val="100"/>
-              </a:spcBef>
-            </a:pPr>
-            <a:r>
-              <a:rPr sz="1000" b="0">
-                <a:solidFill>
-                  <a:srgbClr val="010328"/>
-                </a:solidFill>
-              </a:rPr>
-              <a:t>=== 工单 M2-1a 传统分类：逻辑回归 vs 决策树 · 完成态 ===</a:t>
-            </a:r>
-          </a:p>
-          <a:p>
-            <a:pPr algn="l">
-              <a:spcBef>
-                <a:spcPts val="100"/>
-              </a:spcBef>
-            </a:pPr>
-            <a:r>
-              <a:rPr sz="1000" b="0">
-                <a:solidFill>
-                  <a:srgbClr val="010328"/>
-                </a:solidFill>
-              </a:rPr>
-              <a:t>数据: 300 条三态样本（正常/轴承磨损/叶轮堵塞）· 训练 225 / 测试 75</a:t>
-            </a:r>
-          </a:p>
-          <a:p>
-            <a:pPr algn="l">
-              <a:spcBef>
-                <a:spcPts val="100"/>
-              </a:spcBef>
-            </a:pPr>
-            <a:r>
-              <a:rPr sz="1000" b="0">
-                <a:solidFill>
-                  <a:srgbClr val="010328"/>
-                </a:solidFill>
-              </a:rPr>
-              <a:t>解A 逻辑回归: acc=0.707  macro-F1=0.701</a:t>
-            </a:r>
-          </a:p>
-          <a:p>
-            <a:pPr algn="l">
-              <a:spcBef>
-                <a:spcPts val="100"/>
-              </a:spcBef>
-            </a:pPr>
-            <a:r>
-              <a:rPr sz="1000" b="0">
-                <a:solidFill>
-                  <a:srgbClr val="010328"/>
-                </a:solidFill>
-              </a:rPr>
-              <a:t>  混淆矩阵（行=真实 / 列=预测）</a:t>
-            </a:r>
-          </a:p>
-          <a:p>
-            <a:pPr algn="l">
-              <a:spcBef>
-                <a:spcPts val="100"/>
-              </a:spcBef>
-            </a:pPr>
-            <a:r>
-              <a:rPr sz="1000" b="0">
-                <a:solidFill>
-                  <a:srgbClr val="010328"/>
-                </a:solidFill>
-              </a:rPr>
-              <a:t>                    正常      轴承磨损      叶轮堵塞</a:t>
-            </a:r>
-          </a:p>
-          <a:p>
-            <a:pPr algn="l">
-              <a:spcBef>
-                <a:spcPts val="100"/>
-              </a:spcBef>
-            </a:pPr>
-            <a:r>
-              <a:rPr sz="1000" b="0">
-                <a:solidFill>
-                  <a:srgbClr val="010328"/>
-                </a:solidFill>
-              </a:rPr>
-              <a:t>  正常                13         7         5</a:t>
-            </a:r>
-          </a:p>
-          <a:p>
-            <a:pPr algn="l">
-              <a:spcBef>
-                <a:spcPts val="100"/>
-              </a:spcBef>
-            </a:pPr>
-            <a:r>
-              <a:rPr sz="1000" b="0">
-                <a:solidFill>
-                  <a:srgbClr val="010328"/>
-                </a:solidFill>
-              </a:rPr>
-              <a:t>  轴承磨损               5        19         1</a:t>
-            </a:r>
-          </a:p>
-          <a:p>
-            <a:pPr algn="l">
-              <a:spcBef>
-                <a:spcPts val="100"/>
-              </a:spcBef>
-            </a:pPr>
-            <a:r>
-              <a:rPr sz="1000" b="0">
-                <a:solidFill>
-                  <a:srgbClr val="010328"/>
-                </a:solidFill>
-              </a:rPr>
-              <a:t>  叶轮堵塞               2         2        21</a:t>
-            </a:r>
-          </a:p>
-          <a:p>
-            <a:pPr algn="l">
-              <a:spcBef>
-                <a:spcPts val="100"/>
-              </a:spcBef>
-            </a:pPr>
-            <a:r>
-              <a:rPr sz="1000" b="0">
-                <a:solidFill>
-                  <a:srgbClr val="010328"/>
-                </a:solidFill>
-              </a:rPr>
-              <a:t>结论: 逻辑回归可解释强、决策树易读；漏报（把故障判为正常）是产线最贵的错误 → 决策矩阵权重给'召回率'。</a:t>
+              <a:t>① 本次真跑实测输出（逐字取自 output/report.txt）</a:t>
+            </a:r>
+          </a:p>
+          <a:p>
+            <a:r>
+              <a:rPr sz="1400" b="1">
+                <a:solidFill>
+                  <a:srgbClr val="0545E8"/>
+                </a:solidFill>
+              </a:rPr>
+              <a:t>实测达成档位: 优秀(B) ｜ 基线acc LR 0.707/DT 0.707｜最优 DT macro F1 实测 0.706（口径 average=macro，OvR pos_label 逐类登记）｜阈值曲线每类最少19 点（共 57 点）｜决策记录完整（result.json 回读校验）｜实测规范率 96.22%</a:t>
+            </a:r>
+          </a:p>
+          <a:p>
+            <a:r>
+              <a:rPr sz="1400" b="1">
+                <a:solidFill>
+                  <a:srgbClr val="0545E8"/>
+                </a:solidFill>
+              </a:rPr>
+              <a:t>及格(D)    规范率门槛≥70% [达标] ｜ 功能OK ｜ 基线accuracy输出；代码规范率≥70%</a:t>
+            </a:r>
+          </a:p>
+          <a:p>
+            <a:r>
+              <a:rPr sz="1400" b="1">
+                <a:solidFill>
+                  <a:srgbClr val="0545E8"/>
+                </a:solidFill>
+              </a:rPr>
+              <a:t>良好(C)    规范率门槛≥70% [达标] ｜ 功能OK ｜ F1≥0.70口径正确</a:t>
+            </a:r>
+          </a:p>
+          <a:p>
+            <a:r>
+              <a:rPr sz="1400" b="1">
+                <a:solidFill>
+                  <a:srgbClr val="0545E8"/>
+                </a:solidFill>
+              </a:rPr>
+              <a:t>优秀(B)    规范率门槛≥70% [达标] ｜ 功能OK ｜ 给出阈值方案与理由；决策记录完整</a:t>
+            </a:r>
+          </a:p>
+          <a:p>
+            <a:r>
+              <a:rPr sz="1400" b="1">
+                <a:solidFill>
+                  <a:srgbClr val="0545E8"/>
+                </a:solidFill>
+              </a:rPr>
+              <a:t>优(A)     规范率门槛≥70% [未达标] ｜ 功能缺 ｜ F1≥0.85或方案论证充分</a:t>
+            </a:r>
+          </a:p>
+          <a:p>
+            <a:r>
+              <a:rPr sz="1400" b="1">
+                <a:solidFill>
+                  <a:srgbClr val="0545E8"/>
+                </a:solidFill>
+              </a:rPr>
+              <a:t>优(A) 备选路「方案论证充分」：口头答辩 + 评审评委签认，代码不代判</a:t>
+            </a:r>
+          </a:p>
+          <a:p>
+            <a:r>
+              <a:rPr sz="1400" b="1">
+                <a:solidFill>
+                  <a:srgbClr val="0545E8"/>
+                </a:solidFill>
+              </a:rPr>
+              <a:t>决策矩阵小组打分（可行性/达标概率/工时）：课堂 3 分钟人工环节</a:t>
+            </a:r>
+          </a:p>
+          <a:p>
+            <a:r>
+              <a:rPr sz="1400" b="1">
+                <a:solidFill>
+                  <a:srgbClr val="0545E8"/>
+                </a:solidFill>
+              </a:rPr>
+              <a:t>企业元验收栏：值班师傅签认（功能可用/参数留痕/数据可信）</a:t>
             </a:r>
           </a:p>
         </p:txBody>
@@ -34065,7 +34012,7 @@
                 </a:solidFill>
                 <a:latin typeface="微软雅黑"/>
               </a:rPr>
-              <a:t>39 / 65</a:t>
+              <a:t>39 / 67</a:t>
             </a:r>
           </a:p>
         </p:txBody>
@@ -35259,7 +35206,7 @@
                 </a:solidFill>
                 <a:latin typeface="微软雅黑"/>
               </a:rPr>
-              <a:t>4 / 65</a:t>
+              <a:t>4 / 67</a:t>
             </a:r>
           </a:p>
         </p:txBody>
@@ -35535,7 +35482,7 @@
                 </a:solidFill>
                 <a:latin typeface="微软雅黑"/>
               </a:rPr>
-              <a:t>40 / 65</a:t>
+              <a:t>42 / 67</a:t>
             </a:r>
           </a:p>
         </p:txBody>
@@ -36704,7 +36651,7 @@
         <p:spPr>
           <a:xfrm>
             <a:off x="940000" y="5720000"/>
-            <a:ext cx="10500000" cy="520000"/>
+            <a:ext cx="10500000" cy="731520"/>
           </a:xfrm>
           <a:prstGeom prst="rect">
             <a:avLst/>
@@ -36726,13 +36673,24 @@
               </a:spcAft>
             </a:pPr>
             <a:r>
-              <a:rPr sz="1350" b="1">
+              <a:rPr sz="1050" b="1">
                 <a:solidFill>
                   <a:srgbClr val="010328"/>
                 </a:solidFill>
                 <a:latin typeface="微软雅黑"/>
               </a:rPr>
               <a:t>✔ 达标标准: 基线accuracy输出</a:t>
+            </a:r>
+          </a:p>
+          <a:p>
+            <a:r>
+              <a:rPr sz="1050" b="1">
+                <a:solidFill>
+                  <a:srgbClr val="010328"/>
+                </a:solidFill>
+                <a:latin typeface="微软雅黑"/>
+              </a:rPr>
+              <a:t>✓ 本次实测达标 ｜ 规范率门槛≥70% [达标] ｜ 功能OK</a:t>
             </a:r>
           </a:p>
         </p:txBody>
@@ -36860,7 +36818,7 @@
                 </a:solidFill>
                 <a:latin typeface="微软雅黑"/>
               </a:rPr>
-              <a:t>41 / 65</a:t>
+              <a:t>43 / 67</a:t>
             </a:r>
           </a:p>
         </p:txBody>
@@ -37624,7 +37582,7 @@
         <p:spPr>
           <a:xfrm>
             <a:off x="940000" y="5720000"/>
-            <a:ext cx="10500000" cy="520000"/>
+            <a:ext cx="10500000" cy="731520"/>
           </a:xfrm>
           <a:prstGeom prst="rect">
             <a:avLst/>
@@ -37646,13 +37604,24 @@
               </a:spcAft>
             </a:pPr>
             <a:r>
-              <a:rPr sz="1350" b="1">
+              <a:rPr sz="1050" b="1">
                 <a:solidFill>
                   <a:srgbClr val="010328"/>
                 </a:solidFill>
                 <a:latin typeface="微软雅黑"/>
               </a:rPr>
               <a:t>✔ 达标标准: F1≥0.70口径正确</a:t>
+            </a:r>
+          </a:p>
+          <a:p>
+            <a:r>
+              <a:rPr sz="1050" b="1">
+                <a:solidFill>
+                  <a:srgbClr val="010328"/>
+                </a:solidFill>
+                <a:latin typeface="微软雅黑"/>
+              </a:rPr>
+              <a:t>✓ 本次实测达标 ｜ 规范率门槛≥70% [达标] ｜ 功能OK</a:t>
             </a:r>
           </a:p>
         </p:txBody>
@@ -37780,7 +37749,7 @@
                 </a:solidFill>
                 <a:latin typeface="微软雅黑"/>
               </a:rPr>
-              <a:t>42 / 65</a:t>
+              <a:t>44 / 67</a:t>
             </a:r>
           </a:p>
         </p:txBody>
@@ -38544,7 +38513,7 @@
         <p:spPr>
           <a:xfrm>
             <a:off x="940000" y="5720000"/>
-            <a:ext cx="10500000" cy="520000"/>
+            <a:ext cx="10500000" cy="731520"/>
           </a:xfrm>
           <a:prstGeom prst="rect">
             <a:avLst/>
@@ -38566,13 +38535,24 @@
               </a:spcAft>
             </a:pPr>
             <a:r>
-              <a:rPr sz="1350" b="1">
+              <a:rPr sz="1050" b="1">
                 <a:solidFill>
                   <a:srgbClr val="010328"/>
                 </a:solidFill>
                 <a:latin typeface="微软雅黑"/>
               </a:rPr>
               <a:t>✔ 达标标准: 给出阈值方案与理由</a:t>
+            </a:r>
+          </a:p>
+          <a:p>
+            <a:r>
+              <a:rPr sz="1050" b="1">
+                <a:solidFill>
+                  <a:srgbClr val="010328"/>
+                </a:solidFill>
+                <a:latin typeface="微软雅黑"/>
+              </a:rPr>
+              <a:t>✓ 本次实测达标 ｜ 规范率门槛≥70% [达标] ｜ 功能OK</a:t>
             </a:r>
           </a:p>
         </p:txBody>
@@ -38700,7 +38680,7 @@
                 </a:solidFill>
                 <a:latin typeface="微软雅黑"/>
               </a:rPr>
-              <a:t>43 / 65</a:t>
+              <a:t>45 / 67</a:t>
             </a:r>
           </a:p>
         </p:txBody>
@@ -39464,7 +39444,7 @@
         <p:spPr>
           <a:xfrm>
             <a:off x="940000" y="5720000"/>
-            <a:ext cx="10500000" cy="520000"/>
+            <a:ext cx="10500000" cy="731520"/>
           </a:xfrm>
           <a:prstGeom prst="rect">
             <a:avLst/>
@@ -39486,13 +39466,24 @@
               </a:spcAft>
             </a:pPr>
             <a:r>
-              <a:rPr sz="1350" b="1">
+              <a:rPr sz="1050" b="1">
                 <a:solidFill>
                   <a:srgbClr val="010328"/>
                 </a:solidFill>
                 <a:latin typeface="微软雅黑"/>
               </a:rPr>
               <a:t>✔ 达标标准: F1≥0.85或方案论证充分</a:t>
+            </a:r>
+          </a:p>
+          <a:p>
+            <a:r>
+              <a:rPr sz="1050" b="1">
+                <a:solidFill>
+                  <a:srgbClr val="010328"/>
+                </a:solidFill>
+                <a:latin typeface="微软雅黑"/>
+              </a:rPr>
+              <a:t>✗ 本次实测未达标 ｜ 规范率门槛≥70% [未达标] ｜ 功能缺</a:t>
             </a:r>
           </a:p>
         </p:txBody>
@@ -39620,7 +39611,7 @@
                 </a:solidFill>
                 <a:latin typeface="微软雅黑"/>
               </a:rPr>
-              <a:t>44 / 65</a:t>
+              <a:t>46 / 67</a:t>
             </a:r>
           </a:p>
         </p:txBody>
@@ -40544,7 +40535,7 @@
                 </a:solidFill>
                 <a:latin typeface="微软雅黑"/>
               </a:rPr>
-              <a:t>45 / 65</a:t>
+              <a:t>47 / 67</a:t>
             </a:r>
           </a:p>
         </p:txBody>
@@ -41716,7 +41707,7 @@
                 </a:solidFill>
                 <a:latin typeface="微软雅黑"/>
               </a:rPr>
-              <a:t>46 / 65</a:t>
+              <a:t>48 / 67</a:t>
             </a:r>
           </a:p>
         </p:txBody>
@@ -42508,7 +42499,7 @@
                 </a:solidFill>
                 <a:latin typeface="微软雅黑"/>
               </a:rPr>
-              <a:t>47 / 65</a:t>
+              <a:t>49 / 67</a:t>
             </a:r>
           </a:p>
         </p:txBody>
@@ -43300,7 +43291,7 @@
                 </a:solidFill>
                 <a:latin typeface="微软雅黑"/>
               </a:rPr>
-              <a:t>48 / 65</a:t>
+              <a:t>50 / 67</a:t>
             </a:r>
           </a:p>
         </p:txBody>
@@ -44155,7 +44146,7 @@
                 </a:solidFill>
                 <a:latin typeface="微软雅黑"/>
               </a:rPr>
-              <a:t>49 / 65</a:t>
+              <a:t>51 / 67</a:t>
             </a:r>
           </a:p>
         </p:txBody>
@@ -45127,7 +45118,7 @@
                 </a:solidFill>
                 <a:latin typeface="微软雅黑"/>
               </a:rPr>
-              <a:t>5 / 65</a:t>
+              <a:t>5 / 67</a:t>
             </a:r>
           </a:p>
         </p:txBody>
@@ -45835,7 +45826,7 @@
                 </a:solidFill>
                 <a:latin typeface="微软雅黑"/>
               </a:rPr>
-              <a:t>50 / 65</a:t>
+              <a:t>52 / 67</a:t>
             </a:r>
           </a:p>
         </p:txBody>
@@ -46475,7 +46466,7 @@
                 </a:solidFill>
                 <a:latin typeface="微软雅黑"/>
               </a:rPr>
-              <a:t>51 / 65</a:t>
+              <a:t>53 / 67</a:t>
             </a:r>
           </a:p>
         </p:txBody>
@@ -47447,7 +47438,7 @@
                 </a:solidFill>
                 <a:latin typeface="微软雅黑"/>
               </a:rPr>
-              <a:t>52 / 65</a:t>
+              <a:t>54 / 67</a:t>
             </a:r>
           </a:p>
         </p:txBody>
@@ -48239,7 +48230,7 @@
                 </a:solidFill>
                 <a:latin typeface="微软雅黑"/>
               </a:rPr>
-              <a:t>53 / 65</a:t>
+              <a:t>55 / 67</a:t>
             </a:r>
           </a:p>
         </p:txBody>
@@ -49871,7 +49862,7 @@
                 </a:solidFill>
                 <a:latin typeface="微软雅黑"/>
               </a:rPr>
-              <a:t>54 / 65</a:t>
+              <a:t>56 / 67</a:t>
             </a:r>
           </a:p>
         </p:txBody>
@@ -50669,7 +50660,7 @@
                 </a:solidFill>
                 <a:latin typeface="微软雅黑"/>
               </a:rPr>
-              <a:t>55 / 65</a:t>
+              <a:t>57 / 67</a:t>
             </a:r>
           </a:p>
         </p:txBody>
@@ -51815,7 +51806,7 @@
                 </a:solidFill>
                 <a:latin typeface="微软雅黑"/>
               </a:rPr>
-              <a:t>56 / 65</a:t>
+              <a:t>58 / 67</a:t>
             </a:r>
           </a:p>
         </p:txBody>
@@ -52668,7 +52659,7 @@
                 </a:solidFill>
                 <a:latin typeface="微软雅黑"/>
               </a:rPr>
-              <a:t>57 / 65</a:t>
+              <a:t>59 / 67</a:t>
             </a:r>
           </a:p>
         </p:txBody>
@@ -53640,7 +53631,7 @@
                 </a:solidFill>
                 <a:latin typeface="微软雅黑"/>
               </a:rPr>
-              <a:t>58 / 65</a:t>
+              <a:t>60 / 67</a:t>
             </a:r>
           </a:p>
         </p:txBody>
@@ -54612,7 +54603,7 @@
                 </a:solidFill>
                 <a:latin typeface="微软雅黑"/>
               </a:rPr>
-              <a:t>59 / 65</a:t>
+              <a:t>61 / 67</a:t>
             </a:r>
           </a:p>
         </p:txBody>
@@ -56080,7 +56071,7 @@
                 </a:solidFill>
                 <a:latin typeface="微软雅黑"/>
               </a:rPr>
-              <a:t>6 / 65</a:t>
+              <a:t>6 / 67</a:t>
             </a:r>
           </a:p>
         </p:txBody>
@@ -57052,7 +57043,7 @@
                 </a:solidFill>
                 <a:latin typeface="微软雅黑"/>
               </a:rPr>
-              <a:t>60 / 65</a:t>
+              <a:t>62 / 67</a:t>
             </a:r>
           </a:p>
         </p:txBody>
@@ -58311,7 +58302,7 @@
                 </a:solidFill>
                 <a:latin typeface="微软雅黑"/>
               </a:rPr>
-              <a:t>61 / 65</a:t>
+              <a:t>63 / 67</a:t>
             </a:r>
           </a:p>
         </p:txBody>
@@ -59103,7 +59094,7 @@
                 </a:solidFill>
                 <a:latin typeface="微软雅黑"/>
               </a:rPr>
-              <a:t>62 / 65</a:t>
+              <a:t>64 / 67</a:t>
             </a:r>
           </a:p>
         </p:txBody>
@@ -59809,7 +59800,7 @@
                 </a:solidFill>
                 <a:latin typeface="微软雅黑"/>
               </a:rPr>
-              <a:t>63 / 65</a:t>
+              <a:t>65 / 67</a:t>
             </a:r>
           </a:p>
         </p:txBody>
@@ -60169,7 +60160,7 @@
                 </a:solidFill>
                 <a:latin typeface="微软雅黑"/>
               </a:rPr>
-              <a:t>64 / 65</a:t>
+              <a:t>66 / 67</a:t>
             </a:r>
           </a:p>
         </p:txBody>
@@ -60540,6 +60531,2131 @@
 </p:sld>
 </file>
 
+<file path=ppt/slides/slide66.xml><?xml version="1.0" encoding="utf-8"?>
+<p:sld xmlns:a="http://schemas.openxmlformats.org/drawingml/2006/main" xmlns:p="http://schemas.openxmlformats.org/presentationml/2006/main" xmlns:r="http://schemas.openxmlformats.org/officeDocument/2006/relationships">
+  <p:cSld>
+    <p:spTree>
+      <p:nvGrpSpPr>
+        <p:cNvPr id="1" name=""/>
+        <p:cNvGrpSpPr/>
+        <p:nvPr/>
+      </p:nvGrpSpPr>
+      <p:grpSpPr/>
+      <p:sp>
+        <p:nvSpPr>
+          <p:cNvPr id="2" name="Rectangle 1"/>
+          <p:cNvSpPr/>
+          <p:nvPr/>
+        </p:nvSpPr>
+        <p:spPr>
+          <a:xfrm>
+            <a:off x="0" y="0"/>
+            <a:ext cx="12192000" cy="1150000"/>
+          </a:xfrm>
+          <a:prstGeom prst="rect">
+            <a:avLst/>
+          </a:prstGeom>
+          <a:solidFill>
+            <a:srgbClr val="010328"/>
+          </a:solidFill>
+          <a:ln>
+            <a:noFill/>
+          </a:ln>
+          <a:effectLst/>
+        </p:spPr>
+        <p:style>
+          <a:lnRef idx="1">
+            <a:schemeClr val="accent1"/>
+          </a:lnRef>
+          <a:fillRef idx="3">
+            <a:schemeClr val="accent1"/>
+          </a:fillRef>
+          <a:effectRef idx="2">
+            <a:schemeClr val="accent1"/>
+          </a:effectRef>
+          <a:fontRef idx="minor">
+            <a:schemeClr val="lt1"/>
+          </a:fontRef>
+        </p:style>
+        <p:txBody>
+          <a:bodyPr rtlCol="0" anchor="ctr"/>
+          <a:lstStyle/>
+          <a:p>
+            <a:pPr algn="ctr"/>
+          </a:p>
+        </p:txBody>
+      </p:sp>
+      <p:sp>
+        <p:nvSpPr>
+          <p:cNvPr id="3" name="Rectangle 2"/>
+          <p:cNvSpPr/>
+          <p:nvPr/>
+        </p:nvSpPr>
+        <p:spPr>
+          <a:xfrm>
+            <a:off x="0" y="1150000"/>
+            <a:ext cx="2600000" cy="70000"/>
+          </a:xfrm>
+          <a:prstGeom prst="rect">
+            <a:avLst/>
+          </a:prstGeom>
+          <a:solidFill>
+            <a:srgbClr val="F5670F"/>
+          </a:solidFill>
+          <a:ln>
+            <a:noFill/>
+          </a:ln>
+          <a:effectLst/>
+        </p:spPr>
+        <p:style>
+          <a:lnRef idx="1">
+            <a:schemeClr val="accent1"/>
+          </a:lnRef>
+          <a:fillRef idx="3">
+            <a:schemeClr val="accent1"/>
+          </a:fillRef>
+          <a:effectRef idx="2">
+            <a:schemeClr val="accent1"/>
+          </a:effectRef>
+          <a:fontRef idx="minor">
+            <a:schemeClr val="lt1"/>
+          </a:fontRef>
+        </p:style>
+        <p:txBody>
+          <a:bodyPr rtlCol="0" anchor="ctr"/>
+          <a:lstStyle/>
+          <a:p>
+            <a:pPr algn="ctr"/>
+          </a:p>
+        </p:txBody>
+      </p:sp>
+      <p:sp>
+        <p:nvSpPr>
+          <p:cNvPr id="4" name="TextBox 3"/>
+          <p:cNvSpPr txBox="1"/>
+          <p:nvPr/>
+        </p:nvSpPr>
+        <p:spPr>
+          <a:xfrm>
+            <a:off x="700000" y="300000"/>
+            <a:ext cx="10792000" cy="700000"/>
+          </a:xfrm>
+          <a:prstGeom prst="rect">
+            <a:avLst/>
+          </a:prstGeom>
+          <a:noFill/>
+        </p:spPr>
+        <p:txBody>
+          <a:bodyPr wrap="square" anchor="t">
+            <a:spAutoFit/>
+          </a:bodyPr>
+          <a:lstStyle/>
+          <a:p>
+            <a:pPr algn="l">
+              <a:lnSpc>
+                <a:spcPct val="110000"/>
+              </a:lnSpc>
+              <a:spcAft>
+                <a:spcPts val="600"/>
+              </a:spcAft>
+            </a:pPr>
+            <a:r>
+              <a:rPr sz="2400" b="1">
+                <a:solidFill>
+                  <a:srgbClr val="FFFFFF"/>
+                </a:solidFill>
+                <a:latin typeface="微软雅黑"/>
+              </a:rPr>
+              <a:t>实测验收 · m21a_classic_clf</a:t>
+            </a:r>
+          </a:p>
+        </p:txBody>
+      </p:sp>
+      <p:sp>
+        <p:nvSpPr>
+          <p:cNvPr id="11" name="Rectangle 10"/>
+          <p:cNvSpPr/>
+          <p:nvPr/>
+        </p:nvSpPr>
+        <p:spPr>
+          <a:xfrm>
+            <a:off x="500000" y="6500000"/>
+            <a:ext cx="11100000" cy="20000"/>
+          </a:xfrm>
+          <a:prstGeom prst="rect">
+            <a:avLst/>
+          </a:prstGeom>
+          <a:solidFill>
+            <a:srgbClr val="C9D4EE"/>
+          </a:solidFill>
+          <a:ln>
+            <a:noFill/>
+          </a:ln>
+          <a:effectLst/>
+        </p:spPr>
+        <p:style>
+          <a:lnRef idx="1">
+            <a:schemeClr val="accent1"/>
+          </a:lnRef>
+          <a:fillRef idx="3">
+            <a:schemeClr val="accent1"/>
+          </a:fillRef>
+          <a:effectRef idx="2">
+            <a:schemeClr val="accent1"/>
+          </a:effectRef>
+          <a:fontRef idx="minor">
+            <a:schemeClr val="lt1"/>
+          </a:fontRef>
+        </p:style>
+        <p:txBody>
+          <a:bodyPr rtlCol="0" anchor="ctr"/>
+          <a:lstStyle/>
+          <a:p>
+            <a:pPr algn="ctr"/>
+          </a:p>
+        </p:txBody>
+      </p:sp>
+      <p:sp>
+        <p:nvSpPr>
+          <p:cNvPr id="12" name="TextBox 11"/>
+          <p:cNvSpPr txBox="1"/>
+          <p:nvPr/>
+        </p:nvSpPr>
+        <p:spPr>
+          <a:xfrm>
+            <a:off x="500000" y="6540000"/>
+            <a:ext cx="7000000" cy="300000"/>
+          </a:xfrm>
+          <a:prstGeom prst="rect">
+            <a:avLst/>
+          </a:prstGeom>
+          <a:noFill/>
+        </p:spPr>
+        <p:txBody>
+          <a:bodyPr wrap="square" anchor="t">
+            <a:spAutoFit/>
+          </a:bodyPr>
+          <a:lstStyle/>
+          <a:p>
+            <a:pPr algn="l">
+              <a:lnSpc>
+                <a:spcPct val="110000"/>
+              </a:lnSpc>
+              <a:spcAft>
+                <a:spcPts val="600"/>
+              </a:spcAft>
+            </a:pPr>
+            <a:r>
+              <a:rPr sz="1000" b="0">
+                <a:solidFill>
+                  <a:srgbClr val="8A97B5"/>
+                </a:solidFill>
+                <a:latin typeface="微软雅黑"/>
+              </a:rPr>
+              <a:t>两江智造集团 · AI应用基础48课时版</a:t>
+            </a:r>
+          </a:p>
+        </p:txBody>
+      </p:sp>
+      <p:sp>
+        <p:nvSpPr>
+          <p:cNvPr id="13" name="TextBox 12"/>
+          <p:cNvSpPr txBox="1"/>
+          <p:nvPr/>
+        </p:nvSpPr>
+        <p:spPr>
+          <a:xfrm>
+            <a:off x="10600000" y="6540000"/>
+            <a:ext cx="1000000" cy="300000"/>
+          </a:xfrm>
+          <a:prstGeom prst="rect">
+            <a:avLst/>
+          </a:prstGeom>
+          <a:noFill/>
+        </p:spPr>
+        <p:txBody>
+          <a:bodyPr wrap="square" anchor="t">
+            <a:spAutoFit/>
+          </a:bodyPr>
+          <a:lstStyle/>
+          <a:p>
+            <a:pPr algn="r">
+              <a:lnSpc>
+                <a:spcPct val="110000"/>
+              </a:lnSpc>
+              <a:spcAft>
+                <a:spcPts val="600"/>
+              </a:spcAft>
+            </a:pPr>
+            <a:r>
+              <a:rPr sz="1000" b="0">
+                <a:solidFill>
+                  <a:srgbClr val="8A97B5"/>
+                </a:solidFill>
+                <a:latin typeface="微软雅黑"/>
+              </a:rPr>
+              <a:t>40 / 67</a:t>
+            </a:r>
+          </a:p>
+        </p:txBody>
+      </p:sp>
+      <p:sp>
+        <p:nvSpPr>
+          <p:cNvPr id="14" name="Rectangle 13"/>
+          <p:cNvSpPr/>
+          <p:nvPr/>
+        </p:nvSpPr>
+        <p:spPr>
+          <a:xfrm>
+            <a:off x="0" y="1371600"/>
+            <a:ext cx="12188952" cy="713232"/>
+          </a:xfrm>
+          <a:prstGeom prst="rect">
+            <a:avLst/>
+          </a:prstGeom>
+          <a:solidFill>
+            <a:srgbClr val="F2F5F9"/>
+          </a:solidFill>
+          <a:ln>
+            <a:noFill/>
+          </a:ln>
+          <a:effectLst/>
+        </p:spPr>
+        <p:style>
+          <a:lnRef idx="1">
+            <a:schemeClr val="accent1"/>
+          </a:lnRef>
+          <a:fillRef idx="3">
+            <a:schemeClr val="accent1"/>
+          </a:fillRef>
+          <a:effectRef idx="2">
+            <a:schemeClr val="accent1"/>
+          </a:effectRef>
+          <a:fontRef idx="minor">
+            <a:schemeClr val="lt1"/>
+          </a:fontRef>
+        </p:style>
+        <p:txBody>
+          <a:bodyPr rtlCol="0" anchor="ctr" wrap="square"/>
+          <a:lstStyle/>
+          <a:p>
+            <a:pPr algn="ctr"/>
+          </a:p>
+        </p:txBody>
+      </p:sp>
+      <p:sp>
+        <p:nvSpPr>
+          <p:cNvPr id="15" name="TextBox 14"/>
+          <p:cNvSpPr txBox="1"/>
+          <p:nvPr/>
+        </p:nvSpPr>
+        <p:spPr>
+          <a:xfrm>
+            <a:off x="457200" y="1426464"/>
+            <a:ext cx="2651760" cy="566928"/>
+          </a:xfrm>
+          <a:prstGeom prst="rect">
+            <a:avLst/>
+          </a:prstGeom>
+          <a:noFill/>
+        </p:spPr>
+        <p:txBody>
+          <a:bodyPr wrap="square">
+            <a:spAutoFit/>
+          </a:bodyPr>
+          <a:lstStyle/>
+          <a:p>
+            <a:r>
+              <a:rPr sz="1400" b="1">
+                <a:solidFill>
+                  <a:srgbClr val="B5533A"/>
+                </a:solidFill>
+                <a:latin typeface="微软雅黑"/>
+              </a:rPr>
+              <a:t>实测达成档位</a:t>
+            </a:r>
+          </a:p>
+          <a:p>
+            <a:r>
+              <a:rPr sz="1400" b="1">
+                <a:solidFill>
+                  <a:srgbClr val="B5533A"/>
+                </a:solidFill>
+                <a:latin typeface="微软雅黑"/>
+              </a:rPr>
+              <a:t>优秀(B)</a:t>
+            </a:r>
+          </a:p>
+        </p:txBody>
+      </p:sp>
+      <p:sp>
+        <p:nvSpPr>
+          <p:cNvPr id="16" name="Rectangle 15"/>
+          <p:cNvSpPr/>
+          <p:nvPr/>
+        </p:nvSpPr>
+        <p:spPr>
+          <a:xfrm>
+            <a:off x="3200400" y="1426464"/>
+            <a:ext cx="1627632" cy="603504"/>
+          </a:xfrm>
+          <a:prstGeom prst="rect">
+            <a:avLst/>
+          </a:prstGeom>
+          <a:solidFill>
+            <a:srgbClr val="FFFFFF"/>
+          </a:solidFill>
+          <a:ln>
+            <a:solidFill>
+              <a:srgbClr val="D6DCE4"/>
+            </a:solidFill>
+          </a:ln>
+          <a:effectLst/>
+        </p:spPr>
+        <p:style>
+          <a:lnRef idx="1">
+            <a:schemeClr val="accent1"/>
+          </a:lnRef>
+          <a:fillRef idx="3">
+            <a:schemeClr val="accent1"/>
+          </a:fillRef>
+          <a:effectRef idx="2">
+            <a:schemeClr val="accent1"/>
+          </a:effectRef>
+          <a:fontRef idx="minor">
+            <a:schemeClr val="lt1"/>
+          </a:fontRef>
+        </p:style>
+        <p:txBody>
+          <a:bodyPr rtlCol="0" anchor="ctr" wrap="square"/>
+          <a:lstStyle/>
+          <a:p>
+            <a:pPr algn="ctr"/>
+          </a:p>
+        </p:txBody>
+      </p:sp>
+      <p:sp>
+        <p:nvSpPr>
+          <p:cNvPr id="17" name="TextBox 16"/>
+          <p:cNvSpPr txBox="1"/>
+          <p:nvPr/>
+        </p:nvSpPr>
+        <p:spPr>
+          <a:xfrm>
+            <a:off x="3246120" y="1463040"/>
+            <a:ext cx="1536192" cy="548640"/>
+          </a:xfrm>
+          <a:prstGeom prst="rect">
+            <a:avLst/>
+          </a:prstGeom>
+          <a:noFill/>
+        </p:spPr>
+        <p:txBody>
+          <a:bodyPr wrap="square">
+            <a:spAutoFit/>
+          </a:bodyPr>
+          <a:lstStyle/>
+          <a:p>
+            <a:r>
+              <a:rPr sz="900" b="0">
+                <a:solidFill>
+                  <a:srgbClr val="35506E"/>
+                </a:solidFill>
+                <a:latin typeface="微软雅黑"/>
+              </a:rPr>
+              <a:t>基线acc LR 0.707/DT 0.707</a:t>
+            </a:r>
+          </a:p>
+        </p:txBody>
+      </p:sp>
+      <p:sp>
+        <p:nvSpPr>
+          <p:cNvPr id="18" name="Rectangle 17"/>
+          <p:cNvSpPr/>
+          <p:nvPr/>
+        </p:nvSpPr>
+        <p:spPr>
+          <a:xfrm>
+            <a:off x="4901184" y="1426464"/>
+            <a:ext cx="1627632" cy="603504"/>
+          </a:xfrm>
+          <a:prstGeom prst="rect">
+            <a:avLst/>
+          </a:prstGeom>
+          <a:solidFill>
+            <a:srgbClr val="FFFFFF"/>
+          </a:solidFill>
+          <a:ln>
+            <a:solidFill>
+              <a:srgbClr val="D6DCE4"/>
+            </a:solidFill>
+          </a:ln>
+          <a:effectLst/>
+        </p:spPr>
+        <p:style>
+          <a:lnRef idx="1">
+            <a:schemeClr val="accent1"/>
+          </a:lnRef>
+          <a:fillRef idx="3">
+            <a:schemeClr val="accent1"/>
+          </a:fillRef>
+          <a:effectRef idx="2">
+            <a:schemeClr val="accent1"/>
+          </a:effectRef>
+          <a:fontRef idx="minor">
+            <a:schemeClr val="lt1"/>
+          </a:fontRef>
+        </p:style>
+        <p:txBody>
+          <a:bodyPr rtlCol="0" anchor="ctr" wrap="square"/>
+          <a:lstStyle/>
+          <a:p>
+            <a:pPr algn="ctr"/>
+          </a:p>
+        </p:txBody>
+      </p:sp>
+      <p:sp>
+        <p:nvSpPr>
+          <p:cNvPr id="19" name="TextBox 18"/>
+          <p:cNvSpPr txBox="1"/>
+          <p:nvPr/>
+        </p:nvSpPr>
+        <p:spPr>
+          <a:xfrm>
+            <a:off x="4946904" y="1463040"/>
+            <a:ext cx="1536192" cy="548640"/>
+          </a:xfrm>
+          <a:prstGeom prst="rect">
+            <a:avLst/>
+          </a:prstGeom>
+          <a:noFill/>
+        </p:spPr>
+        <p:txBody>
+          <a:bodyPr wrap="square">
+            <a:spAutoFit/>
+          </a:bodyPr>
+          <a:lstStyle/>
+          <a:p>
+            <a:r>
+              <a:rPr sz="900" b="0">
+                <a:solidFill>
+                  <a:srgbClr val="35506E"/>
+                </a:solidFill>
+                <a:latin typeface="微软雅黑"/>
+              </a:rPr>
+              <a:t>最优 DT macro F1 实测 0.706（口径 average=macr</a:t>
+            </a:r>
+          </a:p>
+        </p:txBody>
+      </p:sp>
+      <p:sp>
+        <p:nvSpPr>
+          <p:cNvPr id="20" name="Rectangle 19"/>
+          <p:cNvSpPr/>
+          <p:nvPr/>
+        </p:nvSpPr>
+        <p:spPr>
+          <a:xfrm>
+            <a:off x="6601968" y="1426464"/>
+            <a:ext cx="1627632" cy="603504"/>
+          </a:xfrm>
+          <a:prstGeom prst="rect">
+            <a:avLst/>
+          </a:prstGeom>
+          <a:solidFill>
+            <a:srgbClr val="FFFFFF"/>
+          </a:solidFill>
+          <a:ln>
+            <a:solidFill>
+              <a:srgbClr val="D6DCE4"/>
+            </a:solidFill>
+          </a:ln>
+          <a:effectLst/>
+        </p:spPr>
+        <p:style>
+          <a:lnRef idx="1">
+            <a:schemeClr val="accent1"/>
+          </a:lnRef>
+          <a:fillRef idx="3">
+            <a:schemeClr val="accent1"/>
+          </a:fillRef>
+          <a:effectRef idx="2">
+            <a:schemeClr val="accent1"/>
+          </a:effectRef>
+          <a:fontRef idx="minor">
+            <a:schemeClr val="lt1"/>
+          </a:fontRef>
+        </p:style>
+        <p:txBody>
+          <a:bodyPr rtlCol="0" anchor="ctr" wrap="square"/>
+          <a:lstStyle/>
+          <a:p>
+            <a:pPr algn="ctr"/>
+          </a:p>
+        </p:txBody>
+      </p:sp>
+      <p:sp>
+        <p:nvSpPr>
+          <p:cNvPr id="21" name="TextBox 20"/>
+          <p:cNvSpPr txBox="1"/>
+          <p:nvPr/>
+        </p:nvSpPr>
+        <p:spPr>
+          <a:xfrm>
+            <a:off x="6647688" y="1463040"/>
+            <a:ext cx="1536192" cy="548640"/>
+          </a:xfrm>
+          <a:prstGeom prst="rect">
+            <a:avLst/>
+          </a:prstGeom>
+          <a:noFill/>
+        </p:spPr>
+        <p:txBody>
+          <a:bodyPr wrap="square">
+            <a:spAutoFit/>
+          </a:bodyPr>
+          <a:lstStyle/>
+          <a:p>
+            <a:r>
+              <a:rPr sz="900" b="0">
+                <a:solidFill>
+                  <a:srgbClr val="35506E"/>
+                </a:solidFill>
+                <a:latin typeface="微软雅黑"/>
+              </a:rPr>
+              <a:t>阈值曲线每类最少19 点（共 57 点）</a:t>
+            </a:r>
+          </a:p>
+        </p:txBody>
+      </p:sp>
+      <p:sp>
+        <p:nvSpPr>
+          <p:cNvPr id="22" name="Rectangle 21"/>
+          <p:cNvSpPr/>
+          <p:nvPr/>
+        </p:nvSpPr>
+        <p:spPr>
+          <a:xfrm>
+            <a:off x="8302752" y="1426464"/>
+            <a:ext cx="1627632" cy="603504"/>
+          </a:xfrm>
+          <a:prstGeom prst="rect">
+            <a:avLst/>
+          </a:prstGeom>
+          <a:solidFill>
+            <a:srgbClr val="FFFFFF"/>
+          </a:solidFill>
+          <a:ln>
+            <a:solidFill>
+              <a:srgbClr val="D6DCE4"/>
+            </a:solidFill>
+          </a:ln>
+          <a:effectLst/>
+        </p:spPr>
+        <p:style>
+          <a:lnRef idx="1">
+            <a:schemeClr val="accent1"/>
+          </a:lnRef>
+          <a:fillRef idx="3">
+            <a:schemeClr val="accent1"/>
+          </a:fillRef>
+          <a:effectRef idx="2">
+            <a:schemeClr val="accent1"/>
+          </a:effectRef>
+          <a:fontRef idx="minor">
+            <a:schemeClr val="lt1"/>
+          </a:fontRef>
+        </p:style>
+        <p:txBody>
+          <a:bodyPr rtlCol="0" anchor="ctr" wrap="square"/>
+          <a:lstStyle/>
+          <a:p>
+            <a:pPr algn="ctr"/>
+          </a:p>
+        </p:txBody>
+      </p:sp>
+      <p:sp>
+        <p:nvSpPr>
+          <p:cNvPr id="23" name="TextBox 22"/>
+          <p:cNvSpPr txBox="1"/>
+          <p:nvPr/>
+        </p:nvSpPr>
+        <p:spPr>
+          <a:xfrm>
+            <a:off x="8348472" y="1463040"/>
+            <a:ext cx="1536192" cy="548640"/>
+          </a:xfrm>
+          <a:prstGeom prst="rect">
+            <a:avLst/>
+          </a:prstGeom>
+          <a:noFill/>
+        </p:spPr>
+        <p:txBody>
+          <a:bodyPr wrap="square">
+            <a:spAutoFit/>
+          </a:bodyPr>
+          <a:lstStyle/>
+          <a:p>
+            <a:r>
+              <a:rPr sz="900" b="0">
+                <a:solidFill>
+                  <a:srgbClr val="35506E"/>
+                </a:solidFill>
+                <a:latin typeface="微软雅黑"/>
+              </a:rPr>
+              <a:t>决策记录完整（result.json 回读校验）</a:t>
+            </a:r>
+          </a:p>
+        </p:txBody>
+      </p:sp>
+      <p:sp>
+        <p:nvSpPr>
+          <p:cNvPr id="24" name="Rectangle 23"/>
+          <p:cNvSpPr/>
+          <p:nvPr/>
+        </p:nvSpPr>
+        <p:spPr>
+          <a:xfrm>
+            <a:off x="10003536" y="1426464"/>
+            <a:ext cx="1627632" cy="603504"/>
+          </a:xfrm>
+          <a:prstGeom prst="rect">
+            <a:avLst/>
+          </a:prstGeom>
+          <a:solidFill>
+            <a:srgbClr val="FFFFFF"/>
+          </a:solidFill>
+          <a:ln>
+            <a:solidFill>
+              <a:srgbClr val="D6DCE4"/>
+            </a:solidFill>
+          </a:ln>
+          <a:effectLst/>
+        </p:spPr>
+        <p:style>
+          <a:lnRef idx="1">
+            <a:schemeClr val="accent1"/>
+          </a:lnRef>
+          <a:fillRef idx="3">
+            <a:schemeClr val="accent1"/>
+          </a:fillRef>
+          <a:effectRef idx="2">
+            <a:schemeClr val="accent1"/>
+          </a:effectRef>
+          <a:fontRef idx="minor">
+            <a:schemeClr val="lt1"/>
+          </a:fontRef>
+        </p:style>
+        <p:txBody>
+          <a:bodyPr rtlCol="0" anchor="ctr" wrap="square"/>
+          <a:lstStyle/>
+          <a:p>
+            <a:pPr algn="ctr"/>
+          </a:p>
+        </p:txBody>
+      </p:sp>
+      <p:sp>
+        <p:nvSpPr>
+          <p:cNvPr id="25" name="TextBox 24"/>
+          <p:cNvSpPr txBox="1"/>
+          <p:nvPr/>
+        </p:nvSpPr>
+        <p:spPr>
+          <a:xfrm>
+            <a:off x="10049256" y="1463040"/>
+            <a:ext cx="1536192" cy="548640"/>
+          </a:xfrm>
+          <a:prstGeom prst="rect">
+            <a:avLst/>
+          </a:prstGeom>
+          <a:noFill/>
+        </p:spPr>
+        <p:txBody>
+          <a:bodyPr wrap="square">
+            <a:spAutoFit/>
+          </a:bodyPr>
+          <a:lstStyle/>
+          <a:p>
+            <a:r>
+              <a:rPr sz="900" b="0">
+                <a:solidFill>
+                  <a:srgbClr val="35506E"/>
+                </a:solidFill>
+                <a:latin typeface="微软雅黑"/>
+              </a:rPr>
+              <a:t>实测规范率 96.22%</a:t>
+            </a:r>
+          </a:p>
+        </p:txBody>
+      </p:sp>
+      <p:graphicFrame>
+        <p:nvGraphicFramePr>
+          <p:cNvPr id="26" name="Table 25"/>
+          <p:cNvGraphicFramePr>
+            <a:graphicFrameLocks noGrp="1"/>
+          </p:cNvGraphicFramePr>
+          <p:nvPr/>
+        </p:nvGraphicFramePr>
+        <p:xfrm>
+          <a:off x="457200" y="2212848"/>
+          <a:ext cx="11274552" cy="2834640"/>
+        </p:xfrm>
+        <a:graphic>
+          <a:graphicData uri="http://schemas.openxmlformats.org/drawingml/2006/table">
+            <a:tbl>
+              <a:tblPr firstRow="1" bandRow="1">
+                <a:tableStyleId>{5C22544A-7EE6-4342-B048-85BDC9FD1C3A}</a:tableStyleId>
+              </a:tblPr>
+              <a:tblGrid>
+                <a:gridCol w="1188720"/>
+                <a:gridCol w="5120640"/>
+                <a:gridCol w="3886200"/>
+                <a:gridCol w="1078992"/>
+              </a:tblGrid>
+              <a:tr h="566928">
+                <a:tc>
+                  <a:txBody>
+                    <a:bodyPr/>
+                    <a:lstStyle/>
+                    <a:p>
+                      <a:r>
+                        <a:rPr sz="1050" b="1">
+                          <a:solidFill>
+                            <a:srgbClr val="FFFFFF"/>
+                          </a:solidFill>
+                          <a:latin typeface="微软雅黑"/>
+                        </a:rPr>
+                        <a:t>档位</a:t>
+                      </a:r>
+                    </a:p>
+                  </a:txBody>
+                  <a:tcPr>
+                    <a:solidFill>
+                      <a:srgbClr val="010328"/>
+                    </a:solidFill>
+                  </a:tcPr>
+                </a:tc>
+                <a:tc>
+                  <a:txBody>
+                    <a:bodyPr/>
+                    <a:lstStyle/>
+                    <a:p>
+                      <a:r>
+                        <a:rPr sz="1050" b="1">
+                          <a:solidFill>
+                            <a:srgbClr val="FFFFFF"/>
+                          </a:solidFill>
+                          <a:latin typeface="微软雅黑"/>
+                        </a:rPr>
+                        <a:t>工单验收标准（原文）</a:t>
+                      </a:r>
+                    </a:p>
+                  </a:txBody>
+                  <a:tcPr>
+                    <a:solidFill>
+                      <a:srgbClr val="010328"/>
+                    </a:solidFill>
+                  </a:tcPr>
+                </a:tc>
+                <a:tc>
+                  <a:txBody>
+                    <a:bodyPr/>
+                    <a:lstStyle/>
+                    <a:p>
+                      <a:r>
+                        <a:rPr sz="1050" b="1">
+                          <a:solidFill>
+                            <a:srgbClr val="FFFFFF"/>
+                          </a:solidFill>
+                          <a:latin typeface="微软雅黑"/>
+                        </a:rPr>
+                        <a:t>本次实测判定</a:t>
+                      </a:r>
+                    </a:p>
+                  </a:txBody>
+                  <a:tcPr>
+                    <a:solidFill>
+                      <a:srgbClr val="010328"/>
+                    </a:solidFill>
+                  </a:tcPr>
+                </a:tc>
+                <a:tc>
+                  <a:txBody>
+                    <a:bodyPr/>
+                    <a:lstStyle/>
+                    <a:p>
+                      <a:r>
+                        <a:rPr sz="1050" b="1">
+                          <a:solidFill>
+                            <a:srgbClr val="FFFFFF"/>
+                          </a:solidFill>
+                          <a:latin typeface="微软雅黑"/>
+                        </a:rPr>
+                        <a:t>判定</a:t>
+                      </a:r>
+                    </a:p>
+                  </a:txBody>
+                  <a:tcPr>
+                    <a:solidFill>
+                      <a:srgbClr val="010328"/>
+                    </a:solidFill>
+                  </a:tcPr>
+                </a:tc>
+              </a:tr>
+              <a:tr h="566928">
+                <a:tc>
+                  <a:txBody>
+                    <a:bodyPr/>
+                    <a:lstStyle/>
+                    <a:p>
+                      <a:r>
+                        <a:rPr sz="1000" b="1">
+                          <a:solidFill>
+                            <a:srgbClr val="2B2F36"/>
+                          </a:solidFill>
+                          <a:latin typeface="微软雅黑"/>
+                        </a:rPr>
+                        <a:t>及格(D)</a:t>
+                      </a:r>
+                    </a:p>
+                  </a:txBody>
+                  <a:tcPr>
+                    <a:solidFill>
+                      <a:srgbClr val="FFFFFF"/>
+                    </a:solidFill>
+                  </a:tcPr>
+                </a:tc>
+                <a:tc>
+                  <a:txBody>
+                    <a:bodyPr/>
+                    <a:lstStyle/>
+                    <a:p>
+                      <a:r>
+                        <a:rPr sz="950" b="0">
+                          <a:solidFill>
+                            <a:srgbClr val="2B2F36"/>
+                          </a:solidFill>
+                          <a:latin typeface="微软雅黑"/>
+                        </a:rPr>
+                        <a:t>基线accuracy输出；代码规范率≥70%</a:t>
+                      </a:r>
+                    </a:p>
+                  </a:txBody>
+                  <a:tcPr>
+                    <a:solidFill>
+                      <a:srgbClr val="FFFFFF"/>
+                    </a:solidFill>
+                  </a:tcPr>
+                </a:tc>
+                <a:tc>
+                  <a:txBody>
+                    <a:bodyPr/>
+                    <a:lstStyle/>
+                    <a:p>
+                      <a:r>
+                        <a:rPr sz="950" b="0">
+                          <a:solidFill>
+                            <a:srgbClr val="2B2F36"/>
+                          </a:solidFill>
+                          <a:latin typeface="微软雅黑"/>
+                        </a:rPr>
+                        <a:t>规范率门槛≥70% [达标] ｜ 功能OK</a:t>
+                      </a:r>
+                    </a:p>
+                  </a:txBody>
+                  <a:tcPr>
+                    <a:solidFill>
+                      <a:srgbClr val="FFFFFF"/>
+                    </a:solidFill>
+                  </a:tcPr>
+                </a:tc>
+                <a:tc>
+                  <a:txBody>
+                    <a:bodyPr/>
+                    <a:lstStyle/>
+                    <a:p>
+                      <a:r>
+                        <a:rPr sz="1000" b="1">
+                          <a:solidFill>
+                            <a:srgbClr val="2E7D46"/>
+                          </a:solidFill>
+                          <a:latin typeface="微软雅黑"/>
+                        </a:rPr>
+                        <a:t>✓ 达标</a:t>
+                      </a:r>
+                    </a:p>
+                  </a:txBody>
+                  <a:tcPr>
+                    <a:solidFill>
+                      <a:srgbClr val="FFFFFF"/>
+                    </a:solidFill>
+                  </a:tcPr>
+                </a:tc>
+              </a:tr>
+              <a:tr h="566928">
+                <a:tc>
+                  <a:txBody>
+                    <a:bodyPr/>
+                    <a:lstStyle/>
+                    <a:p>
+                      <a:r>
+                        <a:rPr sz="1000" b="1">
+                          <a:solidFill>
+                            <a:srgbClr val="2B2F36"/>
+                          </a:solidFill>
+                          <a:latin typeface="微软雅黑"/>
+                        </a:rPr>
+                        <a:t>良好(C)</a:t>
+                      </a:r>
+                    </a:p>
+                  </a:txBody>
+                  <a:tcPr>
+                    <a:solidFill>
+                      <a:srgbClr val="F7F9FB"/>
+                    </a:solidFill>
+                  </a:tcPr>
+                </a:tc>
+                <a:tc>
+                  <a:txBody>
+                    <a:bodyPr/>
+                    <a:lstStyle/>
+                    <a:p>
+                      <a:r>
+                        <a:rPr sz="950" b="0">
+                          <a:solidFill>
+                            <a:srgbClr val="2B2F36"/>
+                          </a:solidFill>
+                          <a:latin typeface="微软雅黑"/>
+                        </a:rPr>
+                        <a:t>F1≥0.70口径正确</a:t>
+                      </a:r>
+                    </a:p>
+                  </a:txBody>
+                  <a:tcPr>
+                    <a:solidFill>
+                      <a:srgbClr val="F7F9FB"/>
+                    </a:solidFill>
+                  </a:tcPr>
+                </a:tc>
+                <a:tc>
+                  <a:txBody>
+                    <a:bodyPr/>
+                    <a:lstStyle/>
+                    <a:p>
+                      <a:r>
+                        <a:rPr sz="950" b="0">
+                          <a:solidFill>
+                            <a:srgbClr val="2B2F36"/>
+                          </a:solidFill>
+                          <a:latin typeface="微软雅黑"/>
+                        </a:rPr>
+                        <a:t>规范率门槛≥70% [达标] ｜ 功能OK</a:t>
+                      </a:r>
+                    </a:p>
+                  </a:txBody>
+                  <a:tcPr>
+                    <a:solidFill>
+                      <a:srgbClr val="F7F9FB"/>
+                    </a:solidFill>
+                  </a:tcPr>
+                </a:tc>
+                <a:tc>
+                  <a:txBody>
+                    <a:bodyPr/>
+                    <a:lstStyle/>
+                    <a:p>
+                      <a:r>
+                        <a:rPr sz="1000" b="1">
+                          <a:solidFill>
+                            <a:srgbClr val="2E7D46"/>
+                          </a:solidFill>
+                          <a:latin typeface="微软雅黑"/>
+                        </a:rPr>
+                        <a:t>✓ 达标</a:t>
+                      </a:r>
+                    </a:p>
+                  </a:txBody>
+                  <a:tcPr>
+                    <a:solidFill>
+                      <a:srgbClr val="F7F9FB"/>
+                    </a:solidFill>
+                  </a:tcPr>
+                </a:tc>
+              </a:tr>
+              <a:tr h="566928">
+                <a:tc>
+                  <a:txBody>
+                    <a:bodyPr/>
+                    <a:lstStyle/>
+                    <a:p>
+                      <a:r>
+                        <a:rPr sz="1000" b="1">
+                          <a:solidFill>
+                            <a:srgbClr val="2B2F36"/>
+                          </a:solidFill>
+                          <a:latin typeface="微软雅黑"/>
+                        </a:rPr>
+                        <a:t>优秀(B)</a:t>
+                      </a:r>
+                    </a:p>
+                  </a:txBody>
+                  <a:tcPr>
+                    <a:solidFill>
+                      <a:srgbClr val="FFFFFF"/>
+                    </a:solidFill>
+                  </a:tcPr>
+                </a:tc>
+                <a:tc>
+                  <a:txBody>
+                    <a:bodyPr/>
+                    <a:lstStyle/>
+                    <a:p>
+                      <a:r>
+                        <a:rPr sz="950" b="0">
+                          <a:solidFill>
+                            <a:srgbClr val="2B2F36"/>
+                          </a:solidFill>
+                          <a:latin typeface="微软雅黑"/>
+                        </a:rPr>
+                        <a:t>给出阈值方案与理由；决策记录完整</a:t>
+                      </a:r>
+                    </a:p>
+                  </a:txBody>
+                  <a:tcPr>
+                    <a:solidFill>
+                      <a:srgbClr val="FFFFFF"/>
+                    </a:solidFill>
+                  </a:tcPr>
+                </a:tc>
+                <a:tc>
+                  <a:txBody>
+                    <a:bodyPr/>
+                    <a:lstStyle/>
+                    <a:p>
+                      <a:r>
+                        <a:rPr sz="950" b="0">
+                          <a:solidFill>
+                            <a:srgbClr val="2B2F36"/>
+                          </a:solidFill>
+                          <a:latin typeface="微软雅黑"/>
+                        </a:rPr>
+                        <a:t>规范率门槛≥70% [达标] ｜ 功能OK</a:t>
+                      </a:r>
+                    </a:p>
+                  </a:txBody>
+                  <a:tcPr>
+                    <a:solidFill>
+                      <a:srgbClr val="FFFFFF"/>
+                    </a:solidFill>
+                  </a:tcPr>
+                </a:tc>
+                <a:tc>
+                  <a:txBody>
+                    <a:bodyPr/>
+                    <a:lstStyle/>
+                    <a:p>
+                      <a:r>
+                        <a:rPr sz="1000" b="1">
+                          <a:solidFill>
+                            <a:srgbClr val="2E7D46"/>
+                          </a:solidFill>
+                          <a:latin typeface="微软雅黑"/>
+                        </a:rPr>
+                        <a:t>✓ 达标</a:t>
+                      </a:r>
+                    </a:p>
+                  </a:txBody>
+                  <a:tcPr>
+                    <a:solidFill>
+                      <a:srgbClr val="FFFFFF"/>
+                    </a:solidFill>
+                  </a:tcPr>
+                </a:tc>
+              </a:tr>
+              <a:tr h="566928">
+                <a:tc>
+                  <a:txBody>
+                    <a:bodyPr/>
+                    <a:lstStyle/>
+                    <a:p>
+                      <a:r>
+                        <a:rPr sz="1000" b="1">
+                          <a:solidFill>
+                            <a:srgbClr val="2B2F36"/>
+                          </a:solidFill>
+                          <a:latin typeface="微软雅黑"/>
+                        </a:rPr>
+                        <a:t>优(A)</a:t>
+                      </a:r>
+                    </a:p>
+                  </a:txBody>
+                  <a:tcPr>
+                    <a:solidFill>
+                      <a:srgbClr val="F7F9FB"/>
+                    </a:solidFill>
+                  </a:tcPr>
+                </a:tc>
+                <a:tc>
+                  <a:txBody>
+                    <a:bodyPr/>
+                    <a:lstStyle/>
+                    <a:p>
+                      <a:r>
+                        <a:rPr sz="950" b="0">
+                          <a:solidFill>
+                            <a:srgbClr val="2B2F36"/>
+                          </a:solidFill>
+                          <a:latin typeface="微软雅黑"/>
+                        </a:rPr>
+                        <a:t>F1≥0.85或方案论证充分</a:t>
+                      </a:r>
+                    </a:p>
+                  </a:txBody>
+                  <a:tcPr>
+                    <a:solidFill>
+                      <a:srgbClr val="F7F9FB"/>
+                    </a:solidFill>
+                  </a:tcPr>
+                </a:tc>
+                <a:tc>
+                  <a:txBody>
+                    <a:bodyPr/>
+                    <a:lstStyle/>
+                    <a:p>
+                      <a:r>
+                        <a:rPr sz="950" b="0">
+                          <a:solidFill>
+                            <a:srgbClr val="2B2F36"/>
+                          </a:solidFill>
+                          <a:latin typeface="微软雅黑"/>
+                        </a:rPr>
+                        <a:t>规范率门槛≥70% [未达标] ｜ 功能缺</a:t>
+                      </a:r>
+                    </a:p>
+                  </a:txBody>
+                  <a:tcPr>
+                    <a:solidFill>
+                      <a:srgbClr val="F7F9FB"/>
+                    </a:solidFill>
+                  </a:tcPr>
+                </a:tc>
+                <a:tc>
+                  <a:txBody>
+                    <a:bodyPr/>
+                    <a:lstStyle/>
+                    <a:p>
+                      <a:r>
+                        <a:rPr sz="1000" b="1">
+                          <a:solidFill>
+                            <a:srgbClr val="B5533A"/>
+                          </a:solidFill>
+                          <a:latin typeface="微软雅黑"/>
+                        </a:rPr>
+                        <a:t>✗ 未达标</a:t>
+                      </a:r>
+                    </a:p>
+                  </a:txBody>
+                  <a:tcPr>
+                    <a:solidFill>
+                      <a:srgbClr val="F7F9FB"/>
+                    </a:solidFill>
+                  </a:tcPr>
+                </a:tc>
+              </a:tr>
+            </a:tbl>
+          </a:graphicData>
+        </a:graphic>
+      </p:graphicFrame>
+      <p:sp>
+        <p:nvSpPr>
+          <p:cNvPr id="27" name="Rectangle 26"/>
+          <p:cNvSpPr/>
+          <p:nvPr/>
+        </p:nvSpPr>
+        <p:spPr>
+          <a:xfrm>
+            <a:off x="457200" y="5138928"/>
+            <a:ext cx="11274552" cy="1261872"/>
+          </a:xfrm>
+          <a:prstGeom prst="rect">
+            <a:avLst/>
+          </a:prstGeom>
+          <a:solidFill>
+            <a:srgbClr val="FFF7E8"/>
+          </a:solidFill>
+          <a:ln>
+            <a:solidFill>
+              <a:srgbClr val="E8C88A"/>
+            </a:solidFill>
+          </a:ln>
+          <a:effectLst/>
+        </p:spPr>
+        <p:style>
+          <a:lnRef idx="1">
+            <a:schemeClr val="accent1"/>
+          </a:lnRef>
+          <a:fillRef idx="3">
+            <a:schemeClr val="accent1"/>
+          </a:fillRef>
+          <a:effectRef idx="2">
+            <a:schemeClr val="accent1"/>
+          </a:effectRef>
+          <a:fontRef idx="minor">
+            <a:schemeClr val="lt1"/>
+          </a:fontRef>
+        </p:style>
+        <p:txBody>
+          <a:bodyPr rtlCol="0" anchor="ctr" wrap="square"/>
+          <a:lstStyle/>
+          <a:p>
+            <a:pPr algn="ctr"/>
+          </a:p>
+        </p:txBody>
+      </p:sp>
+      <p:sp>
+        <p:nvSpPr>
+          <p:cNvPr id="28" name="TextBox 27"/>
+          <p:cNvSpPr txBox="1"/>
+          <p:nvPr/>
+        </p:nvSpPr>
+        <p:spPr>
+          <a:xfrm>
+            <a:off x="621792" y="5212080"/>
+            <a:ext cx="10927080" cy="1133856"/>
+          </a:xfrm>
+          <a:prstGeom prst="rect">
+            <a:avLst/>
+          </a:prstGeom>
+          <a:noFill/>
+        </p:spPr>
+        <p:txBody>
+          <a:bodyPr wrap="square">
+            <a:spAutoFit/>
+          </a:bodyPr>
+          <a:lstStyle/>
+          <a:p>
+            <a:r>
+              <a:rPr sz="1050" b="0">
+                <a:solidFill>
+                  <a:srgbClr val="6B4E16"/>
+                </a:solidFill>
+                <a:latin typeface="微软雅黑"/>
+              </a:rPr>
+              <a:t>人工答辩项 0 条：四档门槛均由代码实测判定</a:t>
+            </a:r>
+          </a:p>
+          <a:p>
+            <a:r>
+              <a:rPr sz="1050" b="0">
+                <a:solidFill>
+                  <a:srgbClr val="6B4E16"/>
+                </a:solidFill>
+                <a:latin typeface="微软雅黑"/>
+              </a:rPr>
+              <a:t>档位是算出来的：判定值由 run.py 本次真跑产生；工单未给数字的门槛在报告里标注为「兜底口径·非工单数字」。</a:t>
+            </a:r>
+          </a:p>
+        </p:txBody>
+      </p:sp>
+    </p:spTree>
+  </p:cSld>
+  <p:clrMapOvr>
+    <a:masterClrMapping/>
+  </p:clrMapOvr>
+</p:sld>
+</file>
+
+<file path=ppt/slides/slide67.xml><?xml version="1.0" encoding="utf-8"?>
+<p:sld xmlns:a="http://schemas.openxmlformats.org/drawingml/2006/main" xmlns:p="http://schemas.openxmlformats.org/presentationml/2006/main" xmlns:r="http://schemas.openxmlformats.org/officeDocument/2006/relationships">
+  <p:cSld>
+    <p:spTree>
+      <p:nvGrpSpPr>
+        <p:cNvPr id="1" name=""/>
+        <p:cNvGrpSpPr/>
+        <p:nvPr/>
+      </p:nvGrpSpPr>
+      <p:grpSpPr/>
+      <p:sp>
+        <p:nvSpPr>
+          <p:cNvPr id="2" name="Rectangle 1"/>
+          <p:cNvSpPr/>
+          <p:nvPr/>
+        </p:nvSpPr>
+        <p:spPr>
+          <a:xfrm>
+            <a:off x="0" y="0"/>
+            <a:ext cx="12192000" cy="1150000"/>
+          </a:xfrm>
+          <a:prstGeom prst="rect">
+            <a:avLst/>
+          </a:prstGeom>
+          <a:solidFill>
+            <a:srgbClr val="010328"/>
+          </a:solidFill>
+          <a:ln>
+            <a:noFill/>
+          </a:ln>
+          <a:effectLst/>
+        </p:spPr>
+        <p:style>
+          <a:lnRef idx="1">
+            <a:schemeClr val="accent1"/>
+          </a:lnRef>
+          <a:fillRef idx="3">
+            <a:schemeClr val="accent1"/>
+          </a:fillRef>
+          <a:effectRef idx="2">
+            <a:schemeClr val="accent1"/>
+          </a:effectRef>
+          <a:fontRef idx="minor">
+            <a:schemeClr val="lt1"/>
+          </a:fontRef>
+        </p:style>
+        <p:txBody>
+          <a:bodyPr rtlCol="0" anchor="ctr"/>
+          <a:lstStyle/>
+          <a:p>
+            <a:pPr algn="ctr"/>
+          </a:p>
+        </p:txBody>
+      </p:sp>
+      <p:sp>
+        <p:nvSpPr>
+          <p:cNvPr id="3" name="Rectangle 2"/>
+          <p:cNvSpPr/>
+          <p:nvPr/>
+        </p:nvSpPr>
+        <p:spPr>
+          <a:xfrm>
+            <a:off x="0" y="1150000"/>
+            <a:ext cx="2600000" cy="70000"/>
+          </a:xfrm>
+          <a:prstGeom prst="rect">
+            <a:avLst/>
+          </a:prstGeom>
+          <a:solidFill>
+            <a:srgbClr val="F5670F"/>
+          </a:solidFill>
+          <a:ln>
+            <a:noFill/>
+          </a:ln>
+          <a:effectLst/>
+        </p:spPr>
+        <p:style>
+          <a:lnRef idx="1">
+            <a:schemeClr val="accent1"/>
+          </a:lnRef>
+          <a:fillRef idx="3">
+            <a:schemeClr val="accent1"/>
+          </a:fillRef>
+          <a:effectRef idx="2">
+            <a:schemeClr val="accent1"/>
+          </a:effectRef>
+          <a:fontRef idx="minor">
+            <a:schemeClr val="lt1"/>
+          </a:fontRef>
+        </p:style>
+        <p:txBody>
+          <a:bodyPr rtlCol="0" anchor="ctr"/>
+          <a:lstStyle/>
+          <a:p>
+            <a:pPr algn="ctr"/>
+          </a:p>
+        </p:txBody>
+      </p:sp>
+      <p:sp>
+        <p:nvSpPr>
+          <p:cNvPr id="4" name="TextBox 3"/>
+          <p:cNvSpPr txBox="1"/>
+          <p:nvPr/>
+        </p:nvSpPr>
+        <p:spPr>
+          <a:xfrm>
+            <a:off x="700000" y="300000"/>
+            <a:ext cx="10792000" cy="700000"/>
+          </a:xfrm>
+          <a:prstGeom prst="rect">
+            <a:avLst/>
+          </a:prstGeom>
+          <a:noFill/>
+        </p:spPr>
+        <p:txBody>
+          <a:bodyPr wrap="square" anchor="t">
+            <a:spAutoFit/>
+          </a:bodyPr>
+          <a:lstStyle/>
+          <a:p>
+            <a:pPr algn="l">
+              <a:lnSpc>
+                <a:spcPct val="110000"/>
+              </a:lnSpc>
+              <a:spcAft>
+                <a:spcPts val="600"/>
+              </a:spcAft>
+            </a:pPr>
+            <a:r>
+              <a:rPr sz="2400" b="1">
+                <a:solidFill>
+                  <a:srgbClr val="FFFFFF"/>
+                </a:solidFill>
+                <a:latin typeface="微软雅黑"/>
+              </a:rPr>
+              <a:t>实跑截图证据 · m21a_classic_clf</a:t>
+            </a:r>
+          </a:p>
+        </p:txBody>
+      </p:sp>
+      <p:sp>
+        <p:nvSpPr>
+          <p:cNvPr id="11" name="Rectangle 10"/>
+          <p:cNvSpPr/>
+          <p:nvPr/>
+        </p:nvSpPr>
+        <p:spPr>
+          <a:xfrm>
+            <a:off x="500000" y="6500000"/>
+            <a:ext cx="11100000" cy="20000"/>
+          </a:xfrm>
+          <a:prstGeom prst="rect">
+            <a:avLst/>
+          </a:prstGeom>
+          <a:solidFill>
+            <a:srgbClr val="C9D4EE"/>
+          </a:solidFill>
+          <a:ln>
+            <a:noFill/>
+          </a:ln>
+          <a:effectLst/>
+        </p:spPr>
+        <p:style>
+          <a:lnRef idx="1">
+            <a:schemeClr val="accent1"/>
+          </a:lnRef>
+          <a:fillRef idx="3">
+            <a:schemeClr val="accent1"/>
+          </a:fillRef>
+          <a:effectRef idx="2">
+            <a:schemeClr val="accent1"/>
+          </a:effectRef>
+          <a:fontRef idx="minor">
+            <a:schemeClr val="lt1"/>
+          </a:fontRef>
+        </p:style>
+        <p:txBody>
+          <a:bodyPr rtlCol="0" anchor="ctr"/>
+          <a:lstStyle/>
+          <a:p>
+            <a:pPr algn="ctr"/>
+          </a:p>
+        </p:txBody>
+      </p:sp>
+      <p:sp>
+        <p:nvSpPr>
+          <p:cNvPr id="12" name="TextBox 11"/>
+          <p:cNvSpPr txBox="1"/>
+          <p:nvPr/>
+        </p:nvSpPr>
+        <p:spPr>
+          <a:xfrm>
+            <a:off x="500000" y="6540000"/>
+            <a:ext cx="7000000" cy="300000"/>
+          </a:xfrm>
+          <a:prstGeom prst="rect">
+            <a:avLst/>
+          </a:prstGeom>
+          <a:noFill/>
+        </p:spPr>
+        <p:txBody>
+          <a:bodyPr wrap="square" anchor="t">
+            <a:spAutoFit/>
+          </a:bodyPr>
+          <a:lstStyle/>
+          <a:p>
+            <a:pPr algn="l">
+              <a:lnSpc>
+                <a:spcPct val="110000"/>
+              </a:lnSpc>
+              <a:spcAft>
+                <a:spcPts val="600"/>
+              </a:spcAft>
+            </a:pPr>
+            <a:r>
+              <a:rPr sz="1000" b="0">
+                <a:solidFill>
+                  <a:srgbClr val="8A97B5"/>
+                </a:solidFill>
+                <a:latin typeface="微软雅黑"/>
+              </a:rPr>
+              <a:t>两江智造集团 · AI应用基础48课时版</a:t>
+            </a:r>
+          </a:p>
+        </p:txBody>
+      </p:sp>
+      <p:sp>
+        <p:nvSpPr>
+          <p:cNvPr id="13" name="TextBox 12"/>
+          <p:cNvSpPr txBox="1"/>
+          <p:nvPr/>
+        </p:nvSpPr>
+        <p:spPr>
+          <a:xfrm>
+            <a:off x="10600000" y="6540000"/>
+            <a:ext cx="1000000" cy="300000"/>
+          </a:xfrm>
+          <a:prstGeom prst="rect">
+            <a:avLst/>
+          </a:prstGeom>
+          <a:noFill/>
+        </p:spPr>
+        <p:txBody>
+          <a:bodyPr wrap="square" anchor="t">
+            <a:spAutoFit/>
+          </a:bodyPr>
+          <a:lstStyle/>
+          <a:p>
+            <a:pPr algn="r">
+              <a:lnSpc>
+                <a:spcPct val="110000"/>
+              </a:lnSpc>
+              <a:spcAft>
+                <a:spcPts val="600"/>
+              </a:spcAft>
+            </a:pPr>
+            <a:r>
+              <a:rPr sz="1000" b="0">
+                <a:solidFill>
+                  <a:srgbClr val="8A97B5"/>
+                </a:solidFill>
+                <a:latin typeface="微软雅黑"/>
+              </a:rPr>
+              <a:t>41 / 67</a:t>
+            </a:r>
+          </a:p>
+        </p:txBody>
+      </p:sp>
+      <p:sp>
+        <p:nvSpPr>
+          <p:cNvPr id="14" name="Rectangle 13"/>
+          <p:cNvSpPr/>
+          <p:nvPr/>
+        </p:nvSpPr>
+        <p:spPr>
+          <a:xfrm>
+            <a:off x="457200" y="1481328"/>
+            <a:ext cx="5486400" cy="2304288"/>
+          </a:xfrm>
+          <a:prstGeom prst="rect">
+            <a:avLst/>
+          </a:prstGeom>
+          <a:solidFill>
+            <a:srgbClr val="FFFFFF"/>
+          </a:solidFill>
+          <a:ln>
+            <a:solidFill>
+              <a:srgbClr val="D6DCE4"/>
+            </a:solidFill>
+          </a:ln>
+          <a:effectLst/>
+        </p:spPr>
+        <p:style>
+          <a:lnRef idx="1">
+            <a:schemeClr val="accent1"/>
+          </a:lnRef>
+          <a:fillRef idx="3">
+            <a:schemeClr val="accent1"/>
+          </a:fillRef>
+          <a:effectRef idx="2">
+            <a:schemeClr val="accent1"/>
+          </a:effectRef>
+          <a:fontRef idx="minor">
+            <a:schemeClr val="lt1"/>
+          </a:fontRef>
+        </p:style>
+        <p:txBody>
+          <a:bodyPr rtlCol="0" anchor="ctr" wrap="square"/>
+          <a:lstStyle/>
+          <a:p>
+            <a:pPr algn="ctr"/>
+          </a:p>
+        </p:txBody>
+      </p:sp>
+      <p:sp>
+        <p:nvSpPr>
+          <p:cNvPr id="15" name="TextBox 14"/>
+          <p:cNvSpPr txBox="1"/>
+          <p:nvPr/>
+        </p:nvSpPr>
+        <p:spPr>
+          <a:xfrm>
+            <a:off x="530352" y="1517904"/>
+            <a:ext cx="5340096" cy="237744"/>
+          </a:xfrm>
+          <a:prstGeom prst="rect">
+            <a:avLst/>
+          </a:prstGeom>
+          <a:noFill/>
+        </p:spPr>
+        <p:txBody>
+          <a:bodyPr wrap="square">
+            <a:spAutoFit/>
+          </a:bodyPr>
+          <a:lstStyle/>
+          <a:p>
+            <a:r>
+              <a:rPr sz="950" b="1">
+                <a:solidFill>
+                  <a:srgbClr val="010328"/>
+                </a:solidFill>
+                <a:latin typeface="微软雅黑"/>
+              </a:rPr>
+              <a:t>① run.py 实跑终端输出（逐字捕获）</a:t>
+            </a:r>
+          </a:p>
+        </p:txBody>
+      </p:sp>
+      <p:pic>
+        <p:nvPicPr>
+          <p:cNvPr id="16" name="Picture 15" descr="shot_run.png"/>
+          <p:cNvPicPr>
+            <a:picLocks noChangeAspect="1"/>
+          </p:cNvPicPr>
+          <p:nvPr/>
+        </p:nvPicPr>
+        <p:blipFill>
+          <a:blip r:embed="rId2"/>
+          <a:stretch>
+            <a:fillRect/>
+          </a:stretch>
+        </p:blipFill>
+        <p:spPr>
+          <a:xfrm>
+            <a:off x="964038" y="1773936"/>
+            <a:ext cx="4472722" cy="1956816"/>
+          </a:xfrm>
+          <a:prstGeom prst="rect">
+            <a:avLst/>
+          </a:prstGeom>
+        </p:spPr>
+      </p:pic>
+      <p:sp>
+        <p:nvSpPr>
+          <p:cNvPr id="17" name="Rectangle 16"/>
+          <p:cNvSpPr/>
+          <p:nvPr/>
+        </p:nvSpPr>
+        <p:spPr>
+          <a:xfrm>
+            <a:off x="6327648" y="1481328"/>
+            <a:ext cx="5486400" cy="2304288"/>
+          </a:xfrm>
+          <a:prstGeom prst="rect">
+            <a:avLst/>
+          </a:prstGeom>
+          <a:solidFill>
+            <a:srgbClr val="FFFFFF"/>
+          </a:solidFill>
+          <a:ln>
+            <a:solidFill>
+              <a:srgbClr val="D6DCE4"/>
+            </a:solidFill>
+          </a:ln>
+          <a:effectLst/>
+        </p:spPr>
+        <p:style>
+          <a:lnRef idx="1">
+            <a:schemeClr val="accent1"/>
+          </a:lnRef>
+          <a:fillRef idx="3">
+            <a:schemeClr val="accent1"/>
+          </a:fillRef>
+          <a:effectRef idx="2">
+            <a:schemeClr val="accent1"/>
+          </a:effectRef>
+          <a:fontRef idx="minor">
+            <a:schemeClr val="lt1"/>
+          </a:fontRef>
+        </p:style>
+        <p:txBody>
+          <a:bodyPr rtlCol="0" anchor="ctr" wrap="square"/>
+          <a:lstStyle/>
+          <a:p>
+            <a:pPr algn="ctr"/>
+          </a:p>
+        </p:txBody>
+      </p:sp>
+      <p:sp>
+        <p:nvSpPr>
+          <p:cNvPr id="18" name="TextBox 17"/>
+          <p:cNvSpPr txBox="1"/>
+          <p:nvPr/>
+        </p:nvSpPr>
+        <p:spPr>
+          <a:xfrm>
+            <a:off x="6400800" y="1517904"/>
+            <a:ext cx="5340096" cy="237744"/>
+          </a:xfrm>
+          <a:prstGeom prst="rect">
+            <a:avLst/>
+          </a:prstGeom>
+          <a:noFill/>
+        </p:spPr>
+        <p:txBody>
+          <a:bodyPr wrap="square">
+            <a:spAutoFit/>
+          </a:bodyPr>
+          <a:lstStyle/>
+          <a:p>
+            <a:r>
+              <a:rPr sz="950" b="1">
+                <a:solidFill>
+                  <a:srgbClr val="010328"/>
+                </a:solidFill>
+                <a:latin typeface="微软雅黑"/>
+              </a:rPr>
+              <a:t>② pytest 全绿终端输出（逐字捕获）</a:t>
+            </a:r>
+          </a:p>
+        </p:txBody>
+      </p:sp>
+      <p:pic>
+        <p:nvPicPr>
+          <p:cNvPr id="19" name="Picture 18" descr="shot_test.png"/>
+          <p:cNvPicPr>
+            <a:picLocks noChangeAspect="1"/>
+          </p:cNvPicPr>
+          <p:nvPr/>
+        </p:nvPicPr>
+        <p:blipFill>
+          <a:blip r:embed="rId3"/>
+          <a:stretch>
+            <a:fillRect/>
+          </a:stretch>
+        </p:blipFill>
+        <p:spPr>
+          <a:xfrm>
+            <a:off x="6834486" y="1773936"/>
+            <a:ext cx="4472722" cy="1956816"/>
+          </a:xfrm>
+          <a:prstGeom prst="rect">
+            <a:avLst/>
+          </a:prstGeom>
+        </p:spPr>
+      </p:pic>
+      <p:sp>
+        <p:nvSpPr>
+          <p:cNvPr id="20" name="Rectangle 19"/>
+          <p:cNvSpPr/>
+          <p:nvPr/>
+        </p:nvSpPr>
+        <p:spPr>
+          <a:xfrm>
+            <a:off x="457200" y="3877056"/>
+            <a:ext cx="5486400" cy="2304288"/>
+          </a:xfrm>
+          <a:prstGeom prst="rect">
+            <a:avLst/>
+          </a:prstGeom>
+          <a:solidFill>
+            <a:srgbClr val="FFFFFF"/>
+          </a:solidFill>
+          <a:ln>
+            <a:solidFill>
+              <a:srgbClr val="D6DCE4"/>
+            </a:solidFill>
+          </a:ln>
+          <a:effectLst/>
+        </p:spPr>
+        <p:style>
+          <a:lnRef idx="1">
+            <a:schemeClr val="accent1"/>
+          </a:lnRef>
+          <a:fillRef idx="3">
+            <a:schemeClr val="accent1"/>
+          </a:fillRef>
+          <a:effectRef idx="2">
+            <a:schemeClr val="accent1"/>
+          </a:effectRef>
+          <a:fontRef idx="minor">
+            <a:schemeClr val="lt1"/>
+          </a:fontRef>
+        </p:style>
+        <p:txBody>
+          <a:bodyPr rtlCol="0" anchor="ctr" wrap="square"/>
+          <a:lstStyle/>
+          <a:p>
+            <a:pPr algn="ctr"/>
+          </a:p>
+        </p:txBody>
+      </p:sp>
+      <p:sp>
+        <p:nvSpPr>
+          <p:cNvPr id="21" name="TextBox 20"/>
+          <p:cNvSpPr txBox="1"/>
+          <p:nvPr/>
+        </p:nvSpPr>
+        <p:spPr>
+          <a:xfrm>
+            <a:off x="530352" y="3913632"/>
+            <a:ext cx="5340096" cy="237744"/>
+          </a:xfrm>
+          <a:prstGeom prst="rect">
+            <a:avLst/>
+          </a:prstGeom>
+          <a:noFill/>
+        </p:spPr>
+        <p:txBody>
+          <a:bodyPr wrap="square">
+            <a:spAutoFit/>
+          </a:bodyPr>
+          <a:lstStyle/>
+          <a:p>
+            <a:r>
+              <a:rPr sz="950" b="1">
+                <a:solidFill>
+                  <a:srgbClr val="010328"/>
+                </a:solidFill>
+                <a:latin typeface="微软雅黑"/>
+              </a:rPr>
+              <a:t>③ report.txt「验收档位判定（实测）」段</a:t>
+            </a:r>
+          </a:p>
+        </p:txBody>
+      </p:sp>
+      <p:pic>
+        <p:nvPicPr>
+          <p:cNvPr id="22" name="Picture 21" descr="shot_report.png"/>
+          <p:cNvPicPr>
+            <a:picLocks noChangeAspect="1"/>
+          </p:cNvPicPr>
+          <p:nvPr/>
+        </p:nvPicPr>
+        <p:blipFill>
+          <a:blip r:embed="rId4"/>
+          <a:stretch>
+            <a:fillRect/>
+          </a:stretch>
+        </p:blipFill>
+        <p:spPr>
+          <a:xfrm>
+            <a:off x="964038" y="4169664"/>
+            <a:ext cx="4472722" cy="1956816"/>
+          </a:xfrm>
+          <a:prstGeom prst="rect">
+            <a:avLst/>
+          </a:prstGeom>
+        </p:spPr>
+      </p:pic>
+      <p:sp>
+        <p:nvSpPr>
+          <p:cNvPr id="23" name="Rectangle 22"/>
+          <p:cNvSpPr/>
+          <p:nvPr/>
+        </p:nvSpPr>
+        <p:spPr>
+          <a:xfrm>
+            <a:off x="6327648" y="3877056"/>
+            <a:ext cx="5486400" cy="2304288"/>
+          </a:xfrm>
+          <a:prstGeom prst="rect">
+            <a:avLst/>
+          </a:prstGeom>
+          <a:solidFill>
+            <a:srgbClr val="F7F9FB"/>
+          </a:solidFill>
+          <a:ln>
+            <a:solidFill>
+              <a:srgbClr val="D6DCE4"/>
+            </a:solidFill>
+          </a:ln>
+          <a:effectLst/>
+        </p:spPr>
+        <p:style>
+          <a:lnRef idx="1">
+            <a:schemeClr val="accent1"/>
+          </a:lnRef>
+          <a:fillRef idx="3">
+            <a:schemeClr val="accent1"/>
+          </a:fillRef>
+          <a:effectRef idx="2">
+            <a:schemeClr val="accent1"/>
+          </a:effectRef>
+          <a:fontRef idx="minor">
+            <a:schemeClr val="lt1"/>
+          </a:fontRef>
+        </p:style>
+        <p:txBody>
+          <a:bodyPr rtlCol="0" anchor="ctr" wrap="square"/>
+          <a:lstStyle/>
+          <a:p>
+            <a:pPr algn="ctr"/>
+          </a:p>
+        </p:txBody>
+      </p:sp>
+      <p:sp>
+        <p:nvSpPr>
+          <p:cNvPr id="24" name="TextBox 23"/>
+          <p:cNvSpPr txBox="1"/>
+          <p:nvPr/>
+        </p:nvSpPr>
+        <p:spPr>
+          <a:xfrm>
+            <a:off x="6400800" y="3913632"/>
+            <a:ext cx="5340096" cy="237744"/>
+          </a:xfrm>
+          <a:prstGeom prst="rect">
+            <a:avLst/>
+          </a:prstGeom>
+          <a:noFill/>
+        </p:spPr>
+        <p:txBody>
+          <a:bodyPr wrap="square">
+            <a:spAutoFit/>
+          </a:bodyPr>
+          <a:lstStyle/>
+          <a:p>
+            <a:r>
+              <a:rPr sz="950" b="1">
+                <a:solidFill>
+                  <a:srgbClr val="010328"/>
+                </a:solidFill>
+                <a:latin typeface="微软雅黑"/>
+              </a:rPr>
+              <a:t>④ 采集口径（可复现）</a:t>
+            </a:r>
+          </a:p>
+        </p:txBody>
+      </p:sp>
+      <p:sp>
+        <p:nvSpPr>
+          <p:cNvPr id="25" name="TextBox 24"/>
+          <p:cNvSpPr txBox="1"/>
+          <p:nvPr/>
+        </p:nvSpPr>
+        <p:spPr>
+          <a:xfrm>
+            <a:off x="6437376" y="4187952"/>
+            <a:ext cx="5266944" cy="1920240"/>
+          </a:xfrm>
+          <a:prstGeom prst="rect">
+            <a:avLst/>
+          </a:prstGeom>
+          <a:noFill/>
+        </p:spPr>
+        <p:txBody>
+          <a:bodyPr wrap="square">
+            <a:spAutoFit/>
+          </a:bodyPr>
+          <a:lstStyle/>
+          <a:p>
+            <a:r>
+              <a:rPr sz="950" b="0">
+                <a:solidFill>
+                  <a:srgbClr val="2B2F36"/>
+                </a:solidFill>
+                <a:latin typeface="微软雅黑"/>
+              </a:rPr>
+              <a:t>项目：05-AI应用基础48课时版/工程化项目/m21a_classic_clf/</a:t>
+            </a:r>
+          </a:p>
+          <a:p>
+            <a:r>
+              <a:rPr sz="950" b="0">
+                <a:solidFill>
+                  <a:srgbClr val="2B2F36"/>
+                </a:solidFill>
+                <a:latin typeface="微软雅黑"/>
+              </a:rPr>
+              <a:t>命令：/opt/anaconda3/bin/python run.py ｜ /opt/anaconda3/bin/python -m pytest -q</a:t>
+            </a:r>
+          </a:p>
+          <a:p>
+            <a:r>
+              <a:rPr sz="950" b="0">
+                <a:solidFill>
+                  <a:srgbClr val="2B2F36"/>
+                </a:solidFill>
+                <a:latin typeface="微软雅黑"/>
+              </a:rPr>
+              <a:t>采集：工具/ppt97/capture97.py（2026-10-28 10:47 真跑逐字捕获输出）</a:t>
+            </a:r>
+          </a:p>
+          <a:p>
+            <a:r>
+              <a:rPr sz="950" b="0">
+                <a:solidFill>
+                  <a:srgbClr val="2B2F36"/>
+                </a:solidFill>
+                <a:latin typeface="微软雅黑"/>
+              </a:rPr>
+              <a:t>渲染：工具/ppt97/terminal_png.py（终端截图，不改写任何数字）</a:t>
+            </a:r>
+          </a:p>
+          <a:p>
+            <a:r>
+              <a:rPr sz="950" b="0">
+                <a:solidFill>
+                  <a:srgbClr val="2B2F36"/>
+                </a:solidFill>
+                <a:latin typeface="微软雅黑"/>
+              </a:rPr>
+              <a:t>退出码：run=0 ｜ pytest=0</a:t>
+            </a:r>
+          </a:p>
+          <a:p>
+            <a:r>
+              <a:rPr sz="950" b="0">
+                <a:solidFill>
+                  <a:srgbClr val="2B2F36"/>
+                </a:solidFill>
+                <a:latin typeface="微软雅黑"/>
+              </a:rPr>
+              <a:t>档位判定取自 output/report.txt「验收档位判定（实测）」段</a:t>
+            </a:r>
+          </a:p>
+        </p:txBody>
+      </p:sp>
+      <p:sp>
+        <p:nvSpPr>
+          <p:cNvPr id="26" name="TextBox 25"/>
+          <p:cNvSpPr txBox="1"/>
+          <p:nvPr/>
+        </p:nvSpPr>
+        <p:spPr>
+          <a:xfrm>
+            <a:off x="457200" y="6254496"/>
+            <a:ext cx="11247120" cy="201168"/>
+          </a:xfrm>
+          <a:prstGeom prst="rect">
+            <a:avLst/>
+          </a:prstGeom>
+          <a:noFill/>
+        </p:spPr>
+        <p:txBody>
+          <a:bodyPr wrap="square">
+            <a:spAutoFit/>
+          </a:bodyPr>
+          <a:lstStyle/>
+          <a:p>
+            <a:r>
+              <a:rPr sz="900" b="0">
+                <a:solidFill>
+                  <a:srgbClr val="7A8698"/>
+                </a:solidFill>
+                <a:latin typeface="微软雅黑"/>
+              </a:rPr>
+              <a:t>截图内容逐字取自 工具/ppt97/evidence/m21a_classic_clf/（capture97.py 真跑捕获，未改写数字）</a:t>
+            </a:r>
+          </a:p>
+        </p:txBody>
+      </p:sp>
+    </p:spTree>
+  </p:cSld>
+  <p:clrMapOvr>
+    <a:masterClrMapping/>
+  </p:clrMapOvr>
+</p:sld>
+</file>
+
 <file path=ppt/slides/slide7.xml><?xml version="1.0" encoding="utf-8"?>
 <p:sld xmlns:a="http://schemas.openxmlformats.org/drawingml/2006/main" xmlns:p="http://schemas.openxmlformats.org/presentationml/2006/main" xmlns:r="http://schemas.openxmlformats.org/officeDocument/2006/relationships">
   <p:cSld>
@@ -61233,7 +63349,7 @@
                 </a:solidFill>
                 <a:latin typeface="微软雅黑"/>
               </a:rPr>
-              <a:t>7 / 65</a:t>
+              <a:t>7 / 67</a:t>
             </a:r>
           </a:p>
         </p:txBody>
@@ -62205,7 +64321,7 @@
                 </a:solidFill>
                 <a:latin typeface="微软雅黑"/>
               </a:rPr>
-              <a:t>8 / 65</a:t>
+              <a:t>8 / 67</a:t>
             </a:r>
           </a:p>
         </p:txBody>
@@ -63060,7 +65176,7 @@
                 </a:solidFill>
                 <a:latin typeface="微软雅黑"/>
               </a:rPr>
-              <a:t>9 / 65</a:t>
+              <a:t>9 / 67</a:t>
             </a:r>
           </a:p>
         </p:txBody>
